--- a/Kubernetes/Trainer/K8s_TrackA_Trainer_Part3.pptx
+++ b/Kubernetes/Trainer/K8s_TrackA_Trainer_Part3.pptx
@@ -4,6 +4,9 @@
   <p:sldMasterIdLst>
     <p:sldMasterId id="2147483648" r:id="rId1"/>
   </p:sldMasterIdLst>
+  <p:notesMasterIdLst>
+    <p:notesMasterId r:id="rId12"/>
+  </p:notesMasterIdLst>
   <p:sldIdLst>
     <p:sldId id="256" r:id="rId2"/>
     <p:sldId id="257" r:id="rId3"/>
@@ -16,10 +19,7 @@
     <p:sldId id="264" r:id="rId10"/>
     <p:sldId id="265" r:id="rId11"/>
   </p:sldIdLst>
-  <p:notesMasterIdLst>
-    <p:notesMasterId r:id="rId12"/>
-  </p:notesMasterIdLst>
-  <p:sldSz cx="9144000" cy="5143500"/>
+  <p:sldSz cx="9144000" cy="5143500" type="screen16x9"/>
   <p:notesSz cx="5143500" cy="9144000"/>
   <p:defaultTextStyle>
     <a:lvl1pPr marL="0" algn="l" defTabSz="914400" rtl="0" eaLnBrk="1" latinLnBrk="0" hangingPunct="1">
@@ -113,6 +113,11 @@
       </a:defRPr>
     </a:lvl9pPr>
   </p:defaultTextStyle>
+  <p:extLst>
+    <p:ext uri="{EFAFB233-063F-42B5-8137-9DF3F51BA10A}">
+      <p15:sldGuideLst xmlns:p15="http://schemas.microsoft.com/office/powerpoint/2012/main"/>
+    </p:ext>
+  </p:extLst>
 </p:presentation>
 </file>
 
@@ -151,7 +156,7 @@
         <p:spPr>
           <a:xfrm>
             <a:off x="0" y="0"/>
-            <a:ext cx="2971800" cy="458788"/>
+            <a:ext cx="2228850" cy="458788"/>
           </a:xfrm>
           <a:prstGeom prst="rect">
             <a:avLst/>
@@ -165,7 +170,7 @@
             </a:lvl1pPr>
           </a:lstStyle>
           <a:p>
-            <a:endParaRPr lang="en-US"/>
+            <a:endParaRPr lang="en-GB"/>
           </a:p>
         </p:txBody>
       </p:sp>
@@ -181,8 +186,8 @@
         </p:nvSpPr>
         <p:spPr>
           <a:xfrm>
-            <a:off x="3884613" y="0"/>
-            <a:ext cx="2971800" cy="458788"/>
+            <a:off x="2913063" y="0"/>
+            <a:ext cx="2228850" cy="458788"/>
           </a:xfrm>
           <a:prstGeom prst="rect">
             <a:avLst/>
@@ -196,11 +201,10 @@
             </a:lvl1pPr>
           </a:lstStyle>
           <a:p>
-            <a:fld id="{5282F153-3F37-0F45-9E97-73ACFA13230C}" type="datetimeFigureOut">
-              <a:rPr lang="en-US"/>
-              <a:t>7/23/19</a:t>
+            <a:fld id="{7D0440F9-D4BD-4BC4-B284-5D48FBF704A2}" type="datetimeFigureOut">
+              <a:t>7/14/2026</a:t>
             </a:fld>
-            <a:endParaRPr lang="en-US"/>
+            <a:endParaRPr lang="en-GB"/>
           </a:p>
         </p:txBody>
       </p:sp>
@@ -216,7 +220,7 @@
         </p:nvSpPr>
         <p:spPr>
           <a:xfrm>
-            <a:off x="685800" y="1143000"/>
+            <a:off x="-171450" y="1143000"/>
             <a:ext cx="5486400" cy="3086100"/>
           </a:xfrm>
           <a:prstGeom prst="rect">
@@ -233,7 +237,7 @@
           <a:bodyPr vert="horz" lIns="91440" tIns="45720" rIns="91440" bIns="45720" rtlCol="0" anchor="ctr"/>
           <a:lstStyle/>
           <a:p>
-            <a:endParaRPr lang="en-US"/>
+            <a:endParaRPr lang="en-GB"/>
           </a:p>
         </p:txBody>
       </p:sp>
@@ -249,8 +253,8 @@
         </p:nvSpPr>
         <p:spPr>
           <a:xfrm>
-            <a:off x="685800" y="4400550"/>
-            <a:ext cx="5486400" cy="3600450"/>
+            <a:off x="514350" y="4400550"/>
+            <a:ext cx="4114800" cy="3600450"/>
           </a:xfrm>
           <a:prstGeom prst="rect">
             <a:avLst/>
@@ -262,35 +266,35 @@
           <a:p>
             <a:pPr lvl="0"/>
             <a:r>
-              <a:rPr lang="en-US"/>
+              <a:rPr lang="en-GB"/>
               <a:t>Click to edit Master text styles</a:t>
             </a:r>
           </a:p>
           <a:p>
             <a:pPr lvl="1"/>
             <a:r>
-              <a:rPr lang="en-US"/>
+              <a:rPr lang="en-GB"/>
               <a:t>Second level</a:t>
             </a:r>
           </a:p>
           <a:p>
             <a:pPr lvl="2"/>
             <a:r>
-              <a:rPr lang="en-US"/>
+              <a:rPr lang="en-GB"/>
               <a:t>Third level</a:t>
             </a:r>
           </a:p>
           <a:p>
             <a:pPr lvl="3"/>
             <a:r>
-              <a:rPr lang="en-US"/>
+              <a:rPr lang="en-GB"/>
               <a:t>Fourth level</a:t>
             </a:r>
           </a:p>
           <a:p>
             <a:pPr lvl="4"/>
             <a:r>
-              <a:rPr lang="en-US"/>
+              <a:rPr lang="en-GB"/>
               <a:t>Fifth level</a:t>
             </a:r>
           </a:p>
@@ -309,7 +313,7 @@
         <p:spPr>
           <a:xfrm>
             <a:off x="0" y="8685213"/>
-            <a:ext cx="2971800" cy="458787"/>
+            <a:ext cx="2228850" cy="458787"/>
           </a:xfrm>
           <a:prstGeom prst="rect">
             <a:avLst/>
@@ -323,7 +327,7 @@
             </a:lvl1pPr>
           </a:lstStyle>
           <a:p>
-            <a:endParaRPr lang="en-US"/>
+            <a:endParaRPr lang="en-GB"/>
           </a:p>
         </p:txBody>
       </p:sp>
@@ -339,8 +343,8 @@
         </p:nvSpPr>
         <p:spPr>
           <a:xfrm>
-            <a:off x="3884613" y="8685213"/>
-            <a:ext cx="2971800" cy="458787"/>
+            <a:off x="2913063" y="8685213"/>
+            <a:ext cx="2228850" cy="458787"/>
           </a:xfrm>
           <a:prstGeom prst="rect">
             <a:avLst/>
@@ -354,18 +358,17 @@
             </a:lvl1pPr>
           </a:lstStyle>
           <a:p>
-            <a:fld id="{CE5E9CC1-C706-0F49-92D6-E571CC5EEA8F}" type="slidenum">
-              <a:rPr lang="en-US"/>
+            <a:fld id="{0F433801-EA64-4D8C-99CE-13CAAC81E889}" type="slidenum">
               <a:t>‹#›</a:t>
             </a:fld>
-            <a:endParaRPr lang="en-US"/>
+            <a:endParaRPr lang="en-GB"/>
           </a:p>
         </p:txBody>
       </p:sp>
     </p:spTree>
     <p:extLst>
       <p:ext uri="{BB962C8B-B14F-4D97-AF65-F5344CB8AC3E}">
-        <p14:creationId xmlns:p14="http://schemas.microsoft.com/office/powerpoint/2010/main" val="1024086991"/>
+        <p14:creationId xmlns:p14="http://schemas.microsoft.com/office/powerpoint/2010/main" val="1965260946"/>
       </p:ext>
     </p:extLst>
   </p:cSld>
@@ -514,7 +517,6 @@
               <a:t>TIMING: 13:00 (after lunch)
 Say: 'kubectl is your main tool for talking to Kubernetes. You will use about 10 commands for 90% of your work. We are going to cover exactly those commands — fast, practical, no fluff.'</a:t>
             </a:r>
-            <a:endParaRPr lang="en-US" dirty="0"/>
           </a:p>
         </p:txBody>
       </p:sp>
@@ -612,7 +614,6 @@
 3. If group qualifies for Track B, send Track B schedule
 4. Complete trainer feedback form</a:t>
             </a:r>
-            <a:endParaRPr lang="en-US" dirty="0"/>
           </a:p>
         </p:txBody>
       </p:sp>
@@ -708,7 +709,6 @@
 Shorthand tip: 'Kubernetes provides short aliases — po, deploy, svc, ns. Saves typing when you are in the terminal all day.'
 Context: 'kubectl always talks to whatever cluster you are currently connected to. Check which cluster: kubectl config current-context'</a:t>
             </a:r>
-            <a:endParaRPr lang="en-US" dirty="0"/>
           </a:p>
         </p:txBody>
       </p:sp>
@@ -805,7 +805,6 @@
 Port-forward tip: 'kubectl port-forward is great for testing a Pod locally without creating a Service. Very useful for debugging.'
 Common mistake: kubectl exec -it &lt;name&gt; -- bash fails on Alpine containers — Alpine has no bash. Use sh instead: kubectl exec -it &lt;name&gt; -- sh</a:t>
             </a:r>
-            <a:endParaRPr lang="en-US" dirty="0"/>
           </a:p>
         </p:txBody>
       </p:sp>
@@ -895,7 +894,6 @@
 The most useful one for debugging: kubectl describe pod &lt;name&gt; → scroll to Events section at the bottom. The Events section tells you exactly why a Pod is failing — ImagePullBackOff, CrashLoopBackOff, OOMKilled etc.
 For fast students who finish the lab early: challenge them with -o yaml and kubectl explain to explore the full object structure.</a:t>
             </a:r>
-            <a:endParaRPr lang="en-US" dirty="0"/>
           </a:p>
         </p:txBody>
       </p:sp>
@@ -996,7 +994,6 @@
 3. Service shows no EXTERNAL-IP (LoadBalancer) — expected with minikube. Use NodePort instead.
 4. Browser shows connection refused — use minikube service webapp --url to get the correct address</a:t>
             </a:r>
-            <a:endParaRPr lang="en-US" dirty="0"/>
           </a:p>
         </p:txBody>
       </p:sp>
@@ -1086,7 +1083,6 @@
 Rolling update (Task 8): run kubectl get pods -w in a second terminal window before running the set image command. Students see old Pods terminating and new Pods starting one by one. Very visual and impactful.
 Rollback (Task 10): if you deployed a bad image intentionally (Task 8 with a broken tag), rollback is even more impressive — the app comes back to life in seconds.</a:t>
             </a:r>
-            <a:endParaRPr lang="en-US" dirty="0"/>
           </a:p>
         </p:txBody>
       </p:sp>
@@ -1176,7 +1172,6 @@
 CrashLoopBackOff is the most confusing for students because they see Pods starting and stopping rapidly. Reassure them: 'This just means your app is crashing. Look at the logs — they will tell you exactly why.'
 Service has no Endpoints is subtle — the Service exists and looks healthy, but the selector doesn't match any Pods. Always check kubectl describe service &lt;name&gt; and look at the Endpoints field. If it says 'none', labels are wrong.</a:t>
             </a:r>
-            <a:endParaRPr lang="en-US" dirty="0"/>
           </a:p>
         </p:txBody>
       </p:sp>
@@ -1267,7 +1262,6 @@
 Acknowledge hesitation: 'You did this once today. The concepts will become natural with repetition. The lab exercises you can take home give you more practice with the same workflow.'
 Bridge to Track B: 'Track B adds ConfigMaps for configuration, Secrets for sensitive data, RBAC for access control, Helm for packaging and Monitoring. All built on exactly what you learned today.'</a:t>
             </a:r>
-            <a:endParaRPr lang="en-US" dirty="0"/>
           </a:p>
         </p:txBody>
       </p:sp>
@@ -1355,7 +1349,6 @@
               <a:rPr lang="en-US" dirty="0"/>
               <a:t>Say: 'Everything on the left — you have done. Docker day and Kubernetes Track A. Track B is available for teams that need deeper K8s knowledge — ConfigMaps for app configuration, Secrets for passwords and tokens, RBAC for access control, Helm for packaging apps, and Monitoring to see what is happening inside your cluster.'</a:t>
             </a:r>
-            <a:endParaRPr lang="en-US" dirty="0"/>
           </a:p>
         </p:txBody>
       </p:sp>
@@ -1428,6 +1421,11 @@
 <file path=ppt/slideMasters/slideMaster1.xml><?xml version="1.0" encoding="utf-8"?>
 <p:sldMaster xmlns:a="http://schemas.openxmlformats.org/drawingml/2006/main" xmlns:r="http://schemas.openxmlformats.org/officeDocument/2006/relationships" xmlns:p="http://schemas.openxmlformats.org/presentationml/2006/main">
   <p:cSld>
+    <p:bg>
+      <p:bgRef idx="1001">
+        <a:schemeClr val="bg1"/>
+      </p:bgRef>
+    </p:bg>
     <p:spTree>
       <p:nvGrpSpPr>
         <p:cNvPr id="1" name=""/>
@@ -1710,6 +1708,7 @@
         <a:solidFill>
           <a:srgbClr val="0F172A"/>
         </a:solidFill>
+        <a:effectLst/>
       </p:bgPr>
     </p:bg>
     <p:spTree>
@@ -1801,11 +1800,11 @@
           <a:bodyPr wrap="square" lIns="0" tIns="0" rIns="0" bIns="0" rtlCol="0" anchor="ctr"/>
           <a:lstStyle/>
           <a:p>
-            <a:pPr indent="0" marL="0">
-              <a:buNone/>
-            </a:pPr>
-            <a:r>
-              <a:rPr lang="en-US" sz="1200" b="1" spc="400" kern="0" dirty="0">
+            <a:pPr marL="0" indent="0">
+              <a:buNone/>
+            </a:pPr>
+            <a:r>
+              <a:rPr lang="en-US" sz="1200" b="1" kern="0" spc="400" dirty="0">
                 <a:solidFill>
                   <a:srgbClr val="326CE5"/>
                 </a:solidFill>
@@ -1840,7 +1839,7 @@
           <a:bodyPr wrap="square" lIns="0" tIns="0" rIns="0" bIns="0" rtlCol="0" anchor="ctr"/>
           <a:lstStyle/>
           <a:p>
-            <a:pPr indent="0" marL="0">
+            <a:pPr marL="0" indent="0">
               <a:buNone/>
             </a:pPr>
             <a:r>
@@ -1879,7 +1878,7 @@
           <a:bodyPr wrap="square" lIns="0" tIns="0" rIns="0" bIns="0" rtlCol="0" anchor="ctr"/>
           <a:lstStyle/>
           <a:p>
-            <a:pPr indent="0" marL="0">
+            <a:pPr marL="0" indent="0">
               <a:buNone/>
             </a:pPr>
             <a:r>
@@ -1913,6 +1912,7 @@
         <a:solidFill>
           <a:srgbClr val="7C2D12"/>
         </a:solidFill>
+        <a:effectLst/>
       </p:bgPr>
     </p:bg>
     <p:spTree>
@@ -2004,7 +2004,7 @@
           <a:bodyPr wrap="square" lIns="0" tIns="0" rIns="0" bIns="0" rtlCol="0" anchor="ctr"/>
           <a:lstStyle/>
           <a:p>
-            <a:pPr indent="0" marL="0">
+            <a:pPr marL="0" indent="0">
               <a:buNone/>
             </a:pPr>
             <a:r>
@@ -2068,7 +2068,7 @@
           <a:bodyPr wrap="square" lIns="0" tIns="0" rIns="0" bIns="0" rtlCol="0" anchor="ctr"/>
           <a:lstStyle/>
           <a:p>
-            <a:pPr indent="0" marL="0">
+            <a:pPr marL="0" indent="0">
               <a:buNone/>
             </a:pPr>
             <a:r>
@@ -2107,7 +2107,7 @@
           <a:bodyPr wrap="square" lIns="0" tIns="0" rIns="0" bIns="0" rtlCol="0" anchor="ctr"/>
           <a:lstStyle/>
           <a:p>
-            <a:pPr indent="0" marL="0">
+            <a:pPr marL="0" indent="0">
               <a:buNone/>
             </a:pPr>
             <a:r>
@@ -2146,7 +2146,7 @@
           <a:bodyPr wrap="square" lIns="0" tIns="0" rIns="0" bIns="0" rtlCol="0" anchor="ctr"/>
           <a:lstStyle/>
           <a:p>
-            <a:pPr indent="0" marL="0">
+            <a:pPr marL="0" indent="0">
               <a:buNone/>
             </a:pPr>
             <a:r>
@@ -2160,9 +2160,6 @@
               </a:rPr>
               <a:t>Post-training:  </a:t>
             </a:r>
-            <a:pPr indent="0" marL="0">
-              <a:buNone/>
-            </a:pPr>
             <a:r>
               <a:rPr lang="en-US" sz="1100" dirty="0">
                 <a:solidFill>
@@ -2204,7 +2201,7 @@
             <a:prstDash val="solid"/>
           </a:ln>
           <a:effectLst>
-            <a:outerShdw sx="100000" sy="100000" kx="0" ky="0" algn="bl" rotWithShape="0" blurRad="101600" dist="38100" dir="2700000">
+            <a:outerShdw blurRad="101600" dist="38100" dir="2700000" algn="bl" rotWithShape="0">
               <a:srgbClr val="000000">
                 <a:alpha val="12000"/>
               </a:srgbClr>
@@ -2233,7 +2230,7 @@
           <a:bodyPr wrap="square" lIns="0" tIns="0" rIns="0" bIns="0" rtlCol="0" anchor="ctr"/>
           <a:lstStyle/>
           <a:p>
-            <a:pPr algn="ctr" indent="0" marL="0">
+            <a:pPr marL="0" indent="0" algn="ctr">
               <a:buNone/>
             </a:pPr>
             <a:r>
@@ -2297,7 +2294,7 @@
           <a:bodyPr wrap="square" lIns="0" tIns="0" rIns="0" bIns="0" rtlCol="0" anchor="ctr"/>
           <a:lstStyle/>
           <a:p>
-            <a:pPr algn="ctr" indent="0" marL="0">
+            <a:pPr marL="0" indent="0" algn="ctr">
               <a:buNone/>
             </a:pPr>
             <a:r>
@@ -2331,6 +2328,7 @@
         <a:solidFill>
           <a:srgbClr val="FFFFFF"/>
         </a:solidFill>
+        <a:effectLst/>
       </p:bgPr>
     </p:bg>
     <p:spTree>
@@ -2393,7 +2391,7 @@
           <a:bodyPr wrap="square" lIns="0" tIns="0" rIns="0" bIns="0" rtlCol="0" anchor="ctr"/>
           <a:lstStyle/>
           <a:p>
-            <a:pPr indent="0" marL="0">
+            <a:pPr marL="0" indent="0">
               <a:buNone/>
             </a:pPr>
             <a:r>
@@ -2459,7 +2457,7 @@
           <a:bodyPr wrap="square" lIns="0" tIns="0" rIns="0" bIns="0" rtlCol="0" anchor="ctr"/>
           <a:lstStyle/>
           <a:p>
-            <a:pPr algn="ctr" indent="0" marL="0">
+            <a:pPr marL="0" indent="0" algn="ctr">
               <a:buNone/>
             </a:pPr>
             <a:r>
@@ -2503,7 +2501,7 @@
             <a:prstDash val="solid"/>
           </a:ln>
           <a:effectLst>
-            <a:outerShdw sx="100000" sy="100000" kx="0" ky="0" algn="bl" rotWithShape="0" blurRad="101600" dist="38100" dir="2700000">
+            <a:outerShdw blurRad="101600" dist="38100" dir="2700000" algn="bl" rotWithShape="0">
               <a:srgbClr val="000000">
                 <a:alpha val="12000"/>
               </a:srgbClr>
@@ -2532,7 +2530,7 @@
           <a:bodyPr wrap="square" lIns="0" tIns="0" rIns="0" bIns="0" rtlCol="0" anchor="ctr"/>
           <a:lstStyle/>
           <a:p>
-            <a:pPr indent="0" marL="0">
+            <a:pPr marL="0" indent="0">
               <a:buNone/>
             </a:pPr>
             <a:r>
@@ -2576,7 +2574,7 @@
             <a:prstDash val="solid"/>
           </a:ln>
           <a:effectLst>
-            <a:outerShdw sx="100000" sy="100000" kx="0" ky="0" algn="bl" rotWithShape="0" blurRad="101600" dist="38100" dir="2700000">
+            <a:outerShdw blurRad="101600" dist="38100" dir="2700000" algn="bl" rotWithShape="0">
               <a:srgbClr val="000000">
                 <a:alpha val="12000"/>
               </a:srgbClr>
@@ -2605,7 +2603,7 @@
           <a:bodyPr wrap="square" lIns="0" tIns="0" rIns="0" bIns="0" rtlCol="0" anchor="ctr"/>
           <a:lstStyle/>
           <a:p>
-            <a:pPr indent="0" marL="0">
+            <a:pPr marL="0" indent="0">
               <a:buNone/>
             </a:pPr>
             <a:r>
@@ -2644,7 +2642,7 @@
           <a:bodyPr wrap="square" lIns="0" tIns="0" rIns="0" bIns="0" rtlCol="0" anchor="ctr"/>
           <a:lstStyle/>
           <a:p>
-            <a:pPr indent="0" marL="0">
+            <a:pPr marL="0" indent="0">
               <a:buNone/>
             </a:pPr>
             <a:r>
@@ -2683,7 +2681,7 @@
           <a:bodyPr wrap="square" lIns="0" tIns="0" rIns="0" bIns="0" rtlCol="0" anchor="ctr"/>
           <a:lstStyle/>
           <a:p>
-            <a:pPr indent="0" marL="0">
+            <a:pPr marL="0" indent="0">
               <a:buNone/>
             </a:pPr>
             <a:r>
@@ -2722,7 +2720,7 @@
           <a:bodyPr wrap="square" lIns="0" tIns="0" rIns="0" bIns="0" rtlCol="0" anchor="ctr"/>
           <a:lstStyle/>
           <a:p>
-            <a:pPr indent="0" marL="0">
+            <a:pPr marL="0" indent="0">
               <a:buNone/>
             </a:pPr>
             <a:r>
@@ -2761,7 +2759,7 @@
           <a:bodyPr wrap="square" lIns="0" tIns="0" rIns="0" bIns="0" rtlCol="0" anchor="ctr"/>
           <a:lstStyle/>
           <a:p>
-            <a:pPr indent="0" marL="0">
+            <a:pPr marL="0" indent="0">
               <a:buNone/>
             </a:pPr>
             <a:r>
@@ -2800,7 +2798,7 @@
           <a:bodyPr wrap="square" lIns="0" tIns="0" rIns="0" bIns="0" rtlCol="0" anchor="ctr"/>
           <a:lstStyle/>
           <a:p>
-            <a:pPr indent="0" marL="0">
+            <a:pPr marL="0" indent="0">
               <a:buNone/>
             </a:pPr>
             <a:r>
@@ -2839,7 +2837,7 @@
           <a:bodyPr wrap="square" lIns="0" tIns="0" rIns="0" bIns="0" rtlCol="0" anchor="ctr"/>
           <a:lstStyle/>
           <a:p>
-            <a:pPr indent="0" marL="0">
+            <a:pPr marL="0" indent="0">
               <a:buNone/>
             </a:pPr>
             <a:r>
@@ -2878,7 +2876,7 @@
           <a:bodyPr wrap="square" lIns="0" tIns="0" rIns="0" bIns="0" rtlCol="0" anchor="ctr"/>
           <a:lstStyle/>
           <a:p>
-            <a:pPr indent="0" marL="0">
+            <a:pPr marL="0" indent="0">
               <a:buNone/>
             </a:pPr>
             <a:r>
@@ -2942,7 +2940,7 @@
           <a:bodyPr wrap="square" lIns="0" tIns="0" rIns="0" bIns="0" rtlCol="0" anchor="ctr"/>
           <a:lstStyle/>
           <a:p>
-            <a:pPr indent="0" marL="0">
+            <a:pPr marL="0" indent="0">
               <a:buNone/>
             </a:pPr>
             <a:r>
@@ -2981,7 +2979,7 @@
           <a:bodyPr wrap="square" lIns="0" tIns="0" rIns="0" bIns="0" rtlCol="0" anchor="ctr"/>
           <a:lstStyle/>
           <a:p>
-            <a:pPr indent="0" marL="0">
+            <a:pPr marL="0" indent="0">
               <a:buNone/>
             </a:pPr>
             <a:r>
@@ -3045,7 +3043,7 @@
           <a:bodyPr wrap="square" lIns="0" tIns="0" rIns="0" bIns="0" rtlCol="0" anchor="ctr"/>
           <a:lstStyle/>
           <a:p>
-            <a:pPr indent="0" marL="0">
+            <a:pPr marL="0" indent="0">
               <a:buNone/>
             </a:pPr>
             <a:r>
@@ -3084,7 +3082,7 @@
           <a:bodyPr wrap="square" lIns="0" tIns="0" rIns="0" bIns="0" rtlCol="0" anchor="ctr"/>
           <a:lstStyle/>
           <a:p>
-            <a:pPr indent="0" marL="0">
+            <a:pPr marL="0" indent="0">
               <a:buNone/>
             </a:pPr>
             <a:r>
@@ -3148,7 +3146,7 @@
           <a:bodyPr wrap="square" lIns="0" tIns="0" rIns="0" bIns="0" rtlCol="0" anchor="ctr"/>
           <a:lstStyle/>
           <a:p>
-            <a:pPr indent="0" marL="0">
+            <a:pPr marL="0" indent="0">
               <a:buNone/>
             </a:pPr>
             <a:r>
@@ -3187,7 +3185,7 @@
           <a:bodyPr wrap="square" lIns="0" tIns="0" rIns="0" bIns="0" rtlCol="0" anchor="ctr"/>
           <a:lstStyle/>
           <a:p>
-            <a:pPr indent="0" marL="0">
+            <a:pPr marL="0" indent="0">
               <a:buNone/>
             </a:pPr>
             <a:r>
@@ -3251,7 +3249,7 @@
           <a:bodyPr wrap="square" lIns="0" tIns="0" rIns="0" bIns="0" rtlCol="0" anchor="ctr"/>
           <a:lstStyle/>
           <a:p>
-            <a:pPr indent="0" marL="0">
+            <a:pPr marL="0" indent="0">
               <a:buNone/>
             </a:pPr>
             <a:r>
@@ -3290,7 +3288,7 @@
           <a:bodyPr wrap="square" lIns="0" tIns="0" rIns="0" bIns="0" rtlCol="0" anchor="ctr"/>
           <a:lstStyle/>
           <a:p>
-            <a:pPr indent="0" marL="0">
+            <a:pPr marL="0" indent="0">
               <a:buNone/>
             </a:pPr>
             <a:r>
@@ -3354,7 +3352,7 @@
           <a:bodyPr wrap="square" lIns="0" tIns="0" rIns="0" bIns="0" rtlCol="0" anchor="ctr"/>
           <a:lstStyle/>
           <a:p>
-            <a:pPr indent="0" marL="0">
+            <a:pPr marL="0" indent="0">
               <a:buNone/>
             </a:pPr>
             <a:r>
@@ -3393,7 +3391,7 @@
           <a:bodyPr wrap="square" lIns="0" tIns="0" rIns="0" bIns="0" rtlCol="0" anchor="ctr"/>
           <a:lstStyle/>
           <a:p>
-            <a:pPr indent="0" marL="0">
+            <a:pPr marL="0" indent="0">
               <a:buNone/>
             </a:pPr>
             <a:r>
@@ -3457,7 +3455,7 @@
           <a:bodyPr wrap="square" lIns="0" tIns="0" rIns="0" bIns="0" rtlCol="0" anchor="ctr"/>
           <a:lstStyle/>
           <a:p>
-            <a:pPr indent="0" marL="0">
+            <a:pPr marL="0" indent="0">
               <a:buNone/>
             </a:pPr>
             <a:r>
@@ -3496,7 +3494,7 @@
           <a:bodyPr wrap="square" lIns="0" tIns="0" rIns="0" bIns="0" rtlCol="0" anchor="ctr"/>
           <a:lstStyle/>
           <a:p>
-            <a:pPr indent="0" marL="0">
+            <a:pPr marL="0" indent="0">
               <a:buNone/>
             </a:pPr>
             <a:r>
@@ -3560,7 +3558,7 @@
           <a:bodyPr wrap="square" lIns="0" tIns="0" rIns="0" bIns="0" rtlCol="0" anchor="ctr"/>
           <a:lstStyle/>
           <a:p>
-            <a:pPr indent="0" marL="0">
+            <a:pPr marL="0" indent="0">
               <a:buNone/>
             </a:pPr>
             <a:r>
@@ -3599,7 +3597,7 @@
           <a:bodyPr wrap="square" lIns="0" tIns="0" rIns="0" bIns="0" rtlCol="0" anchor="ctr"/>
           <a:lstStyle/>
           <a:p>
-            <a:pPr indent="0" marL="0">
+            <a:pPr marL="0" indent="0">
               <a:buNone/>
             </a:pPr>
             <a:r>
@@ -3663,7 +3661,7 @@
           <a:bodyPr wrap="square" lIns="0" tIns="0" rIns="0" bIns="0" rtlCol="0" anchor="ctr"/>
           <a:lstStyle/>
           <a:p>
-            <a:pPr indent="0" marL="0">
+            <a:pPr marL="0" indent="0">
               <a:buNone/>
             </a:pPr>
             <a:r>
@@ -3727,7 +3725,7 @@
           <a:bodyPr wrap="square" lIns="0" tIns="0" rIns="0" bIns="0" rtlCol="0" anchor="ctr"/>
           <a:lstStyle/>
           <a:p>
-            <a:pPr indent="0" marL="0">
+            <a:pPr marL="0" indent="0">
               <a:buNone/>
             </a:pPr>
             <a:r>
@@ -3766,7 +3764,7 @@
           <a:bodyPr wrap="square" lIns="0" tIns="0" rIns="0" bIns="0" rtlCol="0" anchor="ctr"/>
           <a:lstStyle/>
           <a:p>
-            <a:pPr indent="0" marL="0">
+            <a:pPr marL="0" indent="0">
               <a:buNone/>
             </a:pPr>
             <a:r>
@@ -3830,7 +3828,7 @@
           <a:bodyPr wrap="square" lIns="0" tIns="0" rIns="0" bIns="0" rtlCol="0" anchor="ctr"/>
           <a:lstStyle/>
           <a:p>
-            <a:pPr indent="0" marL="0">
+            <a:pPr marL="0" indent="0">
               <a:buNone/>
             </a:pPr>
             <a:r>
@@ -3869,7 +3867,7 @@
           <a:bodyPr wrap="square" lIns="0" tIns="0" rIns="0" bIns="0" rtlCol="0" anchor="ctr"/>
           <a:lstStyle/>
           <a:p>
-            <a:pPr indent="0" marL="0">
+            <a:pPr marL="0" indent="0">
               <a:buNone/>
             </a:pPr>
             <a:r>
@@ -3933,7 +3931,7 @@
           <a:bodyPr wrap="square" lIns="0" tIns="0" rIns="0" bIns="0" rtlCol="0" anchor="ctr"/>
           <a:lstStyle/>
           <a:p>
-            <a:pPr indent="0" marL="0">
+            <a:pPr marL="0" indent="0">
               <a:buNone/>
             </a:pPr>
             <a:r>
@@ -3972,7 +3970,7 @@
           <a:bodyPr wrap="square" lIns="0" tIns="0" rIns="0" bIns="0" rtlCol="0" anchor="ctr"/>
           <a:lstStyle/>
           <a:p>
-            <a:pPr indent="0" marL="0">
+            <a:pPr marL="0" indent="0">
               <a:buNone/>
             </a:pPr>
             <a:r>
@@ -4036,7 +4034,7 @@
           <a:bodyPr wrap="square" lIns="0" tIns="0" rIns="0" bIns="0" rtlCol="0" anchor="ctr"/>
           <a:lstStyle/>
           <a:p>
-            <a:pPr indent="0" marL="0">
+            <a:pPr marL="0" indent="0">
               <a:buNone/>
             </a:pPr>
             <a:r>
@@ -4075,7 +4073,7 @@
           <a:bodyPr wrap="square" lIns="0" tIns="0" rIns="0" bIns="0" rtlCol="0" anchor="ctr"/>
           <a:lstStyle/>
           <a:p>
-            <a:pPr indent="0" marL="0">
+            <a:pPr marL="0" indent="0">
               <a:buNone/>
             </a:pPr>
             <a:r>
@@ -4139,7 +4137,7 @@
           <a:bodyPr wrap="square" lIns="0" tIns="0" rIns="0" bIns="0" rtlCol="0" anchor="ctr"/>
           <a:lstStyle/>
           <a:p>
-            <a:pPr indent="0" marL="0">
+            <a:pPr marL="0" indent="0">
               <a:buNone/>
             </a:pPr>
             <a:r>
@@ -4178,7 +4176,7 @@
           <a:bodyPr wrap="square" lIns="0" tIns="0" rIns="0" bIns="0" rtlCol="0" anchor="ctr"/>
           <a:lstStyle/>
           <a:p>
-            <a:pPr indent="0" marL="0">
+            <a:pPr marL="0" indent="0">
               <a:buNone/>
             </a:pPr>
             <a:r>
@@ -4242,7 +4240,7 @@
           <a:bodyPr wrap="square" lIns="0" tIns="0" rIns="0" bIns="0" rtlCol="0" anchor="ctr"/>
           <a:lstStyle/>
           <a:p>
-            <a:pPr indent="0" marL="0">
+            <a:pPr marL="0" indent="0">
               <a:buNone/>
             </a:pPr>
             <a:r>
@@ -4281,7 +4279,7 @@
           <a:bodyPr wrap="square" lIns="0" tIns="0" rIns="0" bIns="0" rtlCol="0" anchor="ctr"/>
           <a:lstStyle/>
           <a:p>
-            <a:pPr indent="0" marL="0">
+            <a:pPr marL="0" indent="0">
               <a:buNone/>
             </a:pPr>
             <a:r>
@@ -4345,7 +4343,7 @@
           <a:bodyPr wrap="square" lIns="0" tIns="0" rIns="0" bIns="0" rtlCol="0" anchor="ctr"/>
           <a:lstStyle/>
           <a:p>
-            <a:pPr algn="ctr" indent="0" marL="0">
+            <a:pPr marL="0" indent="0" algn="ctr">
               <a:buNone/>
             </a:pPr>
             <a:r>
@@ -4379,6 +4377,7 @@
         <a:solidFill>
           <a:srgbClr val="FFFFFF"/>
         </a:solidFill>
+        <a:effectLst/>
       </p:bgPr>
     </p:bg>
     <p:spTree>
@@ -4441,7 +4440,7 @@
           <a:bodyPr wrap="square" lIns="0" tIns="0" rIns="0" bIns="0" rtlCol="0" anchor="ctr"/>
           <a:lstStyle/>
           <a:p>
-            <a:pPr indent="0" marL="0">
+            <a:pPr marL="0" indent="0">
               <a:buNone/>
             </a:pPr>
             <a:r>
@@ -4507,7 +4506,7 @@
           <a:bodyPr wrap="square" lIns="0" tIns="0" rIns="0" bIns="0" rtlCol="0" anchor="ctr"/>
           <a:lstStyle/>
           <a:p>
-            <a:pPr algn="ctr" indent="0" marL="0">
+            <a:pPr marL="0" indent="0" algn="ctr">
               <a:buNone/>
             </a:pPr>
             <a:r>
@@ -4546,7 +4545,7 @@
           <a:bodyPr wrap="square" lIns="0" tIns="0" rIns="0" bIns="0" rtlCol="0" anchor="ctr"/>
           <a:lstStyle/>
           <a:p>
-            <a:pPr indent="0" marL="0">
+            <a:pPr marL="0" indent="0">
               <a:buNone/>
             </a:pPr>
             <a:r>
@@ -4610,7 +4609,7 @@
           <a:bodyPr wrap="square" lIns="0" tIns="0" rIns="0" bIns="0" rtlCol="0" anchor="ctr"/>
           <a:lstStyle/>
           <a:p>
-            <a:pPr indent="0" marL="0">
+            <a:pPr marL="0" indent="0">
               <a:buNone/>
             </a:pPr>
             <a:r>
@@ -4649,7 +4648,7 @@
           <a:bodyPr wrap="square" lIns="0" tIns="0" rIns="0" bIns="0" rtlCol="0" anchor="ctr"/>
           <a:lstStyle/>
           <a:p>
-            <a:pPr indent="0" marL="0">
+            <a:pPr marL="0" indent="0">
               <a:buNone/>
             </a:pPr>
             <a:r>
@@ -4713,7 +4712,7 @@
           <a:bodyPr wrap="square" lIns="0" tIns="0" rIns="0" bIns="0" rtlCol="0" anchor="ctr"/>
           <a:lstStyle/>
           <a:p>
-            <a:pPr indent="0" marL="0">
+            <a:pPr marL="0" indent="0">
               <a:buNone/>
             </a:pPr>
             <a:r>
@@ -4752,7 +4751,7 @@
           <a:bodyPr wrap="square" lIns="0" tIns="0" rIns="0" bIns="0" rtlCol="0" anchor="ctr"/>
           <a:lstStyle/>
           <a:p>
-            <a:pPr indent="0" marL="0">
+            <a:pPr marL="0" indent="0">
               <a:buNone/>
             </a:pPr>
             <a:r>
@@ -4816,7 +4815,7 @@
           <a:bodyPr wrap="square" lIns="0" tIns="0" rIns="0" bIns="0" rtlCol="0" anchor="ctr"/>
           <a:lstStyle/>
           <a:p>
-            <a:pPr indent="0" marL="0">
+            <a:pPr marL="0" indent="0">
               <a:buNone/>
             </a:pPr>
             <a:r>
@@ -4855,7 +4854,7 @@
           <a:bodyPr wrap="square" lIns="0" tIns="0" rIns="0" bIns="0" rtlCol="0" anchor="ctr"/>
           <a:lstStyle/>
           <a:p>
-            <a:pPr indent="0" marL="0">
+            <a:pPr marL="0" indent="0">
               <a:buNone/>
             </a:pPr>
             <a:r>
@@ -4919,7 +4918,7 @@
           <a:bodyPr wrap="square" lIns="0" tIns="0" rIns="0" bIns="0" rtlCol="0" anchor="ctr"/>
           <a:lstStyle/>
           <a:p>
-            <a:pPr indent="0" marL="0">
+            <a:pPr marL="0" indent="0">
               <a:buNone/>
             </a:pPr>
             <a:r>
@@ -4958,7 +4957,7 @@
           <a:bodyPr wrap="square" lIns="0" tIns="0" rIns="0" bIns="0" rtlCol="0" anchor="ctr"/>
           <a:lstStyle/>
           <a:p>
-            <a:pPr indent="0" marL="0">
+            <a:pPr marL="0" indent="0">
               <a:buNone/>
             </a:pPr>
             <a:r>
@@ -4997,7 +4996,7 @@
           <a:bodyPr wrap="square" lIns="0" tIns="0" rIns="0" bIns="0" rtlCol="0" anchor="ctr"/>
           <a:lstStyle/>
           <a:p>
-            <a:pPr indent="0" marL="0">
+            <a:pPr marL="0" indent="0">
               <a:buNone/>
             </a:pPr>
             <a:r>
@@ -5061,7 +5060,7 @@
           <a:bodyPr wrap="square" lIns="0" tIns="0" rIns="0" bIns="0" rtlCol="0" anchor="ctr"/>
           <a:lstStyle/>
           <a:p>
-            <a:pPr indent="0" marL="0">
+            <a:pPr marL="0" indent="0">
               <a:buNone/>
             </a:pPr>
             <a:r>
@@ -5100,7 +5099,7 @@
           <a:bodyPr wrap="square" lIns="0" tIns="0" rIns="0" bIns="0" rtlCol="0" anchor="ctr"/>
           <a:lstStyle/>
           <a:p>
-            <a:pPr indent="0" marL="0">
+            <a:pPr marL="0" indent="0">
               <a:buNone/>
             </a:pPr>
             <a:r>
@@ -5164,7 +5163,7 @@
           <a:bodyPr wrap="square" lIns="0" tIns="0" rIns="0" bIns="0" rtlCol="0" anchor="ctr"/>
           <a:lstStyle/>
           <a:p>
-            <a:pPr indent="0" marL="0">
+            <a:pPr marL="0" indent="0">
               <a:buNone/>
             </a:pPr>
             <a:r>
@@ -5203,7 +5202,7 @@
           <a:bodyPr wrap="square" lIns="0" tIns="0" rIns="0" bIns="0" rtlCol="0" anchor="ctr"/>
           <a:lstStyle/>
           <a:p>
-            <a:pPr indent="0" marL="0">
+            <a:pPr marL="0" indent="0">
               <a:buNone/>
             </a:pPr>
             <a:r>
@@ -5267,7 +5266,7 @@
           <a:bodyPr wrap="square" lIns="0" tIns="0" rIns="0" bIns="0" rtlCol="0" anchor="ctr"/>
           <a:lstStyle/>
           <a:p>
-            <a:pPr indent="0" marL="0">
+            <a:pPr marL="0" indent="0">
               <a:buNone/>
             </a:pPr>
             <a:r>
@@ -5306,7 +5305,7 @@
           <a:bodyPr wrap="square" lIns="0" tIns="0" rIns="0" bIns="0" rtlCol="0" anchor="ctr"/>
           <a:lstStyle/>
           <a:p>
-            <a:pPr indent="0" marL="0">
+            <a:pPr marL="0" indent="0">
               <a:buNone/>
             </a:pPr>
             <a:r>
@@ -5370,7 +5369,7 @@
           <a:bodyPr wrap="square" lIns="0" tIns="0" rIns="0" bIns="0" rtlCol="0" anchor="ctr"/>
           <a:lstStyle/>
           <a:p>
-            <a:pPr indent="0" marL="0">
+            <a:pPr marL="0" indent="0">
               <a:buNone/>
             </a:pPr>
             <a:r>
@@ -5409,7 +5408,7 @@
           <a:bodyPr wrap="square" lIns="0" tIns="0" rIns="0" bIns="0" rtlCol="0" anchor="ctr"/>
           <a:lstStyle/>
           <a:p>
-            <a:pPr indent="0" marL="0">
+            <a:pPr marL="0" indent="0">
               <a:buNone/>
             </a:pPr>
             <a:r>
@@ -5448,7 +5447,7 @@
           <a:bodyPr wrap="square" lIns="0" tIns="0" rIns="0" bIns="0" rtlCol="0" anchor="ctr"/>
           <a:lstStyle/>
           <a:p>
-            <a:pPr indent="0" marL="0">
+            <a:pPr marL="0" indent="0">
               <a:buNone/>
             </a:pPr>
             <a:r>
@@ -5512,7 +5511,7 @@
           <a:bodyPr wrap="square" lIns="0" tIns="0" rIns="0" bIns="0" rtlCol="0" anchor="ctr"/>
           <a:lstStyle/>
           <a:p>
-            <a:pPr indent="0" marL="0">
+            <a:pPr marL="0" indent="0">
               <a:buNone/>
             </a:pPr>
             <a:r>
@@ -5551,7 +5550,7 @@
           <a:bodyPr wrap="square" lIns="0" tIns="0" rIns="0" bIns="0" rtlCol="0" anchor="ctr"/>
           <a:lstStyle/>
           <a:p>
-            <a:pPr indent="0" marL="0">
+            <a:pPr marL="0" indent="0">
               <a:buNone/>
             </a:pPr>
             <a:r>
@@ -5615,7 +5614,7 @@
           <a:bodyPr wrap="square" lIns="0" tIns="0" rIns="0" bIns="0" rtlCol="0" anchor="ctr"/>
           <a:lstStyle/>
           <a:p>
-            <a:pPr indent="0" marL="0">
+            <a:pPr marL="0" indent="0">
               <a:buNone/>
             </a:pPr>
             <a:r>
@@ -5654,7 +5653,7 @@
           <a:bodyPr wrap="square" lIns="0" tIns="0" rIns="0" bIns="0" rtlCol="0" anchor="ctr"/>
           <a:lstStyle/>
           <a:p>
-            <a:pPr indent="0" marL="0">
+            <a:pPr marL="0" indent="0">
               <a:buNone/>
             </a:pPr>
             <a:r>
@@ -5718,7 +5717,7 @@
           <a:bodyPr wrap="square" lIns="0" tIns="0" rIns="0" bIns="0" rtlCol="0" anchor="ctr"/>
           <a:lstStyle/>
           <a:p>
-            <a:pPr indent="0" marL="0">
+            <a:pPr marL="0" indent="0">
               <a:buNone/>
             </a:pPr>
             <a:r>
@@ -5757,7 +5756,7 @@
           <a:bodyPr wrap="square" lIns="0" tIns="0" rIns="0" bIns="0" rtlCol="0" anchor="ctr"/>
           <a:lstStyle/>
           <a:p>
-            <a:pPr indent="0" marL="0">
+            <a:pPr marL="0" indent="0">
               <a:buNone/>
             </a:pPr>
             <a:r>
@@ -5821,7 +5820,7 @@
           <a:bodyPr wrap="square" lIns="0" tIns="0" rIns="0" bIns="0" rtlCol="0" anchor="ctr"/>
           <a:lstStyle/>
           <a:p>
-            <a:pPr indent="0" marL="0">
+            <a:pPr marL="0" indent="0">
               <a:buNone/>
             </a:pPr>
             <a:r>
@@ -5860,7 +5859,7 @@
           <a:bodyPr wrap="square" lIns="0" tIns="0" rIns="0" bIns="0" rtlCol="0" anchor="ctr"/>
           <a:lstStyle/>
           <a:p>
-            <a:pPr indent="0" marL="0">
+            <a:pPr marL="0" indent="0">
               <a:buNone/>
             </a:pPr>
             <a:r>
@@ -5899,7 +5898,7 @@
           <a:bodyPr wrap="square" lIns="0" tIns="0" rIns="0" bIns="0" rtlCol="0" anchor="ctr"/>
           <a:lstStyle/>
           <a:p>
-            <a:pPr indent="0" marL="0">
+            <a:pPr marL="0" indent="0">
               <a:buNone/>
             </a:pPr>
             <a:r>
@@ -5963,7 +5962,7 @@
           <a:bodyPr wrap="square" lIns="0" tIns="0" rIns="0" bIns="0" rtlCol="0" anchor="ctr"/>
           <a:lstStyle/>
           <a:p>
-            <a:pPr indent="0" marL="0">
+            <a:pPr marL="0" indent="0">
               <a:buNone/>
             </a:pPr>
             <a:r>
@@ -6002,7 +6001,7 @@
           <a:bodyPr wrap="square" lIns="0" tIns="0" rIns="0" bIns="0" rtlCol="0" anchor="ctr"/>
           <a:lstStyle/>
           <a:p>
-            <a:pPr indent="0" marL="0">
+            <a:pPr marL="0" indent="0">
               <a:buNone/>
             </a:pPr>
             <a:r>
@@ -6066,7 +6065,7 @@
           <a:bodyPr wrap="square" lIns="0" tIns="0" rIns="0" bIns="0" rtlCol="0" anchor="ctr"/>
           <a:lstStyle/>
           <a:p>
-            <a:pPr indent="0" marL="0">
+            <a:pPr marL="0" indent="0">
               <a:buNone/>
             </a:pPr>
             <a:r>
@@ -6105,7 +6104,7 @@
           <a:bodyPr wrap="square" lIns="0" tIns="0" rIns="0" bIns="0" rtlCol="0" anchor="ctr"/>
           <a:lstStyle/>
           <a:p>
-            <a:pPr indent="0" marL="0">
+            <a:pPr marL="0" indent="0">
               <a:buNone/>
             </a:pPr>
             <a:r>
@@ -6169,7 +6168,7 @@
           <a:bodyPr wrap="square" lIns="0" tIns="0" rIns="0" bIns="0" rtlCol="0" anchor="ctr"/>
           <a:lstStyle/>
           <a:p>
-            <a:pPr indent="0" marL="0">
+            <a:pPr marL="0" indent="0">
               <a:buNone/>
             </a:pPr>
             <a:r>
@@ -6208,7 +6207,7 @@
           <a:bodyPr wrap="square" lIns="0" tIns="0" rIns="0" bIns="0" rtlCol="0" anchor="ctr"/>
           <a:lstStyle/>
           <a:p>
-            <a:pPr indent="0" marL="0">
+            <a:pPr marL="0" indent="0">
               <a:buNone/>
             </a:pPr>
             <a:r>
@@ -6272,7 +6271,7 @@
           <a:bodyPr wrap="square" lIns="0" tIns="0" rIns="0" bIns="0" rtlCol="0" anchor="ctr"/>
           <a:lstStyle/>
           <a:p>
-            <a:pPr indent="0" marL="0">
+            <a:pPr marL="0" indent="0">
               <a:buNone/>
             </a:pPr>
             <a:r>
@@ -6311,7 +6310,7 @@
           <a:bodyPr wrap="square" lIns="0" tIns="0" rIns="0" bIns="0" rtlCol="0" anchor="ctr"/>
           <a:lstStyle/>
           <a:p>
-            <a:pPr indent="0" marL="0">
+            <a:pPr marL="0" indent="0">
               <a:buNone/>
             </a:pPr>
             <a:r>
@@ -6375,7 +6374,7 @@
           <a:bodyPr wrap="square" lIns="0" tIns="0" rIns="0" bIns="0" rtlCol="0" anchor="ctr"/>
           <a:lstStyle/>
           <a:p>
-            <a:pPr algn="ctr" indent="0" marL="0">
+            <a:pPr marL="0" indent="0" algn="ctr">
               <a:buNone/>
             </a:pPr>
             <a:r>
@@ -6409,6 +6408,7 @@
         <a:solidFill>
           <a:srgbClr val="FFFFFF"/>
         </a:solidFill>
+        <a:effectLst/>
       </p:bgPr>
     </p:bg>
     <p:spTree>
@@ -6471,7 +6471,7 @@
           <a:bodyPr wrap="square" lIns="0" tIns="0" rIns="0" bIns="0" rtlCol="0" anchor="ctr"/>
           <a:lstStyle/>
           <a:p>
-            <a:pPr indent="0" marL="0">
+            <a:pPr marL="0" indent="0">
               <a:buNone/>
             </a:pPr>
             <a:r>
@@ -6537,7 +6537,7 @@
           <a:bodyPr wrap="square" lIns="0" tIns="0" rIns="0" bIns="0" rtlCol="0" anchor="ctr"/>
           <a:lstStyle/>
           <a:p>
-            <a:pPr algn="ctr" indent="0" marL="0">
+            <a:pPr marL="0" indent="0" algn="ctr">
               <a:buNone/>
             </a:pPr>
             <a:r>
@@ -6603,7 +6603,7 @@
           <a:bodyPr wrap="square" lIns="0" tIns="0" rIns="0" bIns="0" rtlCol="0" anchor="ctr"/>
           <a:lstStyle/>
           <a:p>
-            <a:pPr algn="ctr" indent="0" marL="0">
+            <a:pPr marL="0" indent="0" algn="ctr">
               <a:buNone/>
             </a:pPr>
             <a:r>
@@ -6667,7 +6667,7 @@
           <a:bodyPr wrap="square" lIns="0" tIns="0" rIns="0" bIns="0" rtlCol="0" anchor="ctr"/>
           <a:lstStyle/>
           <a:p>
-            <a:pPr indent="0" marL="0">
+            <a:pPr marL="0" indent="0">
               <a:buNone/>
             </a:pPr>
             <a:r>
@@ -6706,7 +6706,7 @@
           <a:bodyPr wrap="square" lIns="0" tIns="0" rIns="0" bIns="0" rtlCol="0" anchor="ctr"/>
           <a:lstStyle/>
           <a:p>
-            <a:pPr indent="0" marL="0">
+            <a:pPr marL="0" indent="0">
               <a:buNone/>
             </a:pPr>
             <a:r>
@@ -6745,7 +6745,7 @@
           <a:bodyPr wrap="square" lIns="0" tIns="0" rIns="0" bIns="0" rtlCol="0" anchor="ctr"/>
           <a:lstStyle/>
           <a:p>
-            <a:pPr indent="0" marL="0">
+            <a:pPr marL="0" indent="0">
               <a:buNone/>
             </a:pPr>
             <a:r>
@@ -6809,7 +6809,7 @@
           <a:bodyPr wrap="square" lIns="0" tIns="0" rIns="0" bIns="0" rtlCol="0" anchor="ctr"/>
           <a:lstStyle/>
           <a:p>
-            <a:pPr indent="0" marL="0">
+            <a:pPr marL="0" indent="0">
               <a:buNone/>
             </a:pPr>
             <a:r>
@@ -6848,7 +6848,7 @@
           <a:bodyPr wrap="square" lIns="0" tIns="0" rIns="0" bIns="0" rtlCol="0" anchor="ctr"/>
           <a:lstStyle/>
           <a:p>
-            <a:pPr indent="0" marL="0">
+            <a:pPr marL="0" indent="0">
               <a:buNone/>
             </a:pPr>
             <a:r>
@@ -6887,7 +6887,7 @@
           <a:bodyPr wrap="square" lIns="0" tIns="0" rIns="0" bIns="0" rtlCol="0" anchor="ctr"/>
           <a:lstStyle/>
           <a:p>
-            <a:pPr indent="0" marL="0">
+            <a:pPr marL="0" indent="0">
               <a:buNone/>
             </a:pPr>
             <a:r>
@@ -6951,7 +6951,7 @@
           <a:bodyPr wrap="square" lIns="0" tIns="0" rIns="0" bIns="0" rtlCol="0" anchor="ctr"/>
           <a:lstStyle/>
           <a:p>
-            <a:pPr indent="0" marL="0">
+            <a:pPr marL="0" indent="0">
               <a:buNone/>
             </a:pPr>
             <a:r>
@@ -6990,7 +6990,7 @@
           <a:bodyPr wrap="square" lIns="0" tIns="0" rIns="0" bIns="0" rtlCol="0" anchor="ctr"/>
           <a:lstStyle/>
           <a:p>
-            <a:pPr indent="0" marL="0">
+            <a:pPr marL="0" indent="0">
               <a:buNone/>
             </a:pPr>
             <a:r>
@@ -7029,7 +7029,7 @@
           <a:bodyPr wrap="square" lIns="0" tIns="0" rIns="0" bIns="0" rtlCol="0" anchor="ctr"/>
           <a:lstStyle/>
           <a:p>
-            <a:pPr indent="0" marL="0">
+            <a:pPr marL="0" indent="0">
               <a:buNone/>
             </a:pPr>
             <a:r>
@@ -7093,7 +7093,7 @@
           <a:bodyPr wrap="square" lIns="0" tIns="0" rIns="0" bIns="0" rtlCol="0" anchor="ctr"/>
           <a:lstStyle/>
           <a:p>
-            <a:pPr indent="0" marL="0">
+            <a:pPr marL="0" indent="0">
               <a:buNone/>
             </a:pPr>
             <a:r>
@@ -7132,7 +7132,7 @@
           <a:bodyPr wrap="square" lIns="0" tIns="0" rIns="0" bIns="0" rtlCol="0" anchor="ctr"/>
           <a:lstStyle/>
           <a:p>
-            <a:pPr indent="0" marL="0">
+            <a:pPr marL="0" indent="0">
               <a:buNone/>
             </a:pPr>
             <a:r>
@@ -7171,7 +7171,7 @@
           <a:bodyPr wrap="square" lIns="0" tIns="0" rIns="0" bIns="0" rtlCol="0" anchor="ctr"/>
           <a:lstStyle/>
           <a:p>
-            <a:pPr indent="0" marL="0">
+            <a:pPr marL="0" indent="0">
               <a:buNone/>
             </a:pPr>
             <a:r>
@@ -7235,7 +7235,7 @@
           <a:bodyPr wrap="square" lIns="0" tIns="0" rIns="0" bIns="0" rtlCol="0" anchor="ctr"/>
           <a:lstStyle/>
           <a:p>
-            <a:pPr indent="0" marL="0">
+            <a:pPr marL="0" indent="0">
               <a:buNone/>
             </a:pPr>
             <a:r>
@@ -7274,7 +7274,7 @@
           <a:bodyPr wrap="square" lIns="0" tIns="0" rIns="0" bIns="0" rtlCol="0" anchor="ctr"/>
           <a:lstStyle/>
           <a:p>
-            <a:pPr indent="0" marL="0">
+            <a:pPr marL="0" indent="0">
               <a:buNone/>
             </a:pPr>
             <a:r>
@@ -7313,7 +7313,7 @@
           <a:bodyPr wrap="square" lIns="0" tIns="0" rIns="0" bIns="0" rtlCol="0" anchor="ctr"/>
           <a:lstStyle/>
           <a:p>
-            <a:pPr indent="0" marL="0">
+            <a:pPr marL="0" indent="0">
               <a:buNone/>
             </a:pPr>
             <a:r>
@@ -7377,7 +7377,7 @@
           <a:bodyPr wrap="square" lIns="0" tIns="0" rIns="0" bIns="0" rtlCol="0" anchor="ctr"/>
           <a:lstStyle/>
           <a:p>
-            <a:pPr indent="0" marL="0">
+            <a:pPr marL="0" indent="0">
               <a:buNone/>
             </a:pPr>
             <a:r>
@@ -7416,7 +7416,7 @@
           <a:bodyPr wrap="square" lIns="0" tIns="0" rIns="0" bIns="0" rtlCol="0" anchor="ctr"/>
           <a:lstStyle/>
           <a:p>
-            <a:pPr indent="0" marL="0">
+            <a:pPr marL="0" indent="0">
               <a:buNone/>
             </a:pPr>
             <a:r>
@@ -7455,7 +7455,7 @@
           <a:bodyPr wrap="square" lIns="0" tIns="0" rIns="0" bIns="0" rtlCol="0" anchor="ctr"/>
           <a:lstStyle/>
           <a:p>
-            <a:pPr indent="0" marL="0">
+            <a:pPr marL="0" indent="0">
               <a:buNone/>
             </a:pPr>
             <a:r>
@@ -7519,7 +7519,7 @@
           <a:bodyPr wrap="square" lIns="0" tIns="0" rIns="0" bIns="0" rtlCol="0" anchor="ctr"/>
           <a:lstStyle/>
           <a:p>
-            <a:pPr indent="0" marL="0">
+            <a:pPr marL="0" indent="0">
               <a:buNone/>
             </a:pPr>
             <a:r>
@@ -7558,7 +7558,7 @@
           <a:bodyPr wrap="square" lIns="0" tIns="0" rIns="0" bIns="0" rtlCol="0" anchor="ctr"/>
           <a:lstStyle/>
           <a:p>
-            <a:pPr indent="0" marL="0">
+            <a:pPr marL="0" indent="0">
               <a:buNone/>
             </a:pPr>
             <a:r>
@@ -7597,7 +7597,7 @@
           <a:bodyPr wrap="square" lIns="0" tIns="0" rIns="0" bIns="0" rtlCol="0" anchor="ctr"/>
           <a:lstStyle/>
           <a:p>
-            <a:pPr indent="0" marL="0">
+            <a:pPr marL="0" indent="0">
               <a:buNone/>
             </a:pPr>
             <a:r>
@@ -7661,7 +7661,7 @@
           <a:bodyPr wrap="square" lIns="0" tIns="0" rIns="0" bIns="0" rtlCol="0" anchor="ctr"/>
           <a:lstStyle/>
           <a:p>
-            <a:pPr indent="0" marL="0">
+            <a:pPr marL="0" indent="0">
               <a:buNone/>
             </a:pPr>
             <a:r>
@@ -7700,7 +7700,7 @@
           <a:bodyPr wrap="square" lIns="0" tIns="0" rIns="0" bIns="0" rtlCol="0" anchor="ctr"/>
           <a:lstStyle/>
           <a:p>
-            <a:pPr indent="0" marL="0">
+            <a:pPr marL="0" indent="0">
               <a:buNone/>
             </a:pPr>
             <a:r>
@@ -7739,7 +7739,7 @@
           <a:bodyPr wrap="square" lIns="0" tIns="0" rIns="0" bIns="0" rtlCol="0" anchor="ctr"/>
           <a:lstStyle/>
           <a:p>
-            <a:pPr indent="0" marL="0">
+            <a:pPr marL="0" indent="0">
               <a:buNone/>
             </a:pPr>
             <a:r>
@@ -7803,7 +7803,7 @@
           <a:bodyPr wrap="square" lIns="0" tIns="0" rIns="0" bIns="0" rtlCol="0" anchor="ctr"/>
           <a:lstStyle/>
           <a:p>
-            <a:pPr algn="ctr" indent="0" marL="0">
+            <a:pPr marL="0" indent="0" algn="ctr">
               <a:buNone/>
             </a:pPr>
             <a:r>
@@ -7837,6 +7837,7 @@
         <a:solidFill>
           <a:srgbClr val="0F172A"/>
         </a:solidFill>
+        <a:effectLst/>
       </p:bgPr>
     </p:bg>
     <p:spTree>
@@ -7928,11 +7929,11 @@
           <a:bodyPr wrap="square" lIns="0" tIns="0" rIns="0" bIns="0" rtlCol="0" anchor="ctr"/>
           <a:lstStyle/>
           <a:p>
-            <a:pPr indent="0" marL="0">
-              <a:buNone/>
-            </a:pPr>
-            <a:r>
-              <a:rPr lang="en-US" sz="1300" b="1" spc="200" kern="0" dirty="0">
+            <a:pPr marL="0" indent="0">
+              <a:buNone/>
+            </a:pPr>
+            <a:r>
+              <a:rPr lang="en-US" sz="1300" b="1" kern="0" spc="200" dirty="0">
                 <a:solidFill>
                   <a:srgbClr val="326CE5"/>
                 </a:solidFill>
@@ -7967,7 +7968,7 @@
           <a:bodyPr wrap="square" lIns="0" tIns="0" rIns="0" bIns="0" rtlCol="0" anchor="ctr"/>
           <a:lstStyle/>
           <a:p>
-            <a:pPr indent="0" marL="0">
+            <a:pPr marL="0" indent="0">
               <a:buNone/>
             </a:pPr>
             <a:r>
@@ -8056,7 +8057,7 @@
           <a:bodyPr wrap="square" lIns="0" tIns="0" rIns="0" bIns="0" rtlCol="0" anchor="ctr"/>
           <a:lstStyle/>
           <a:p>
-            <a:pPr algn="ctr" indent="0" marL="0">
+            <a:pPr marL="0" indent="0" algn="ctr">
               <a:buNone/>
             </a:pPr>
             <a:r>
@@ -8095,7 +8096,7 @@
           <a:bodyPr wrap="square" lIns="0" tIns="0" rIns="0" bIns="0" rtlCol="0" anchor="ctr"/>
           <a:lstStyle/>
           <a:p>
-            <a:pPr indent="0" marL="0">
+            <a:pPr marL="0" indent="0">
               <a:buNone/>
             </a:pPr>
             <a:r>
@@ -8159,7 +8160,7 @@
           <a:bodyPr wrap="square" lIns="0" tIns="0" rIns="0" bIns="0" rtlCol="0" anchor="ctr"/>
           <a:lstStyle/>
           <a:p>
-            <a:pPr algn="ctr" indent="0" marL="0">
+            <a:pPr marL="0" indent="0" algn="ctr">
               <a:buNone/>
             </a:pPr>
             <a:r>
@@ -8198,7 +8199,7 @@
           <a:bodyPr wrap="square" lIns="0" tIns="0" rIns="0" bIns="0" rtlCol="0" anchor="ctr"/>
           <a:lstStyle/>
           <a:p>
-            <a:pPr indent="0" marL="0">
+            <a:pPr marL="0" indent="0">
               <a:buNone/>
             </a:pPr>
             <a:r>
@@ -8262,7 +8263,7 @@
           <a:bodyPr wrap="square" lIns="0" tIns="0" rIns="0" bIns="0" rtlCol="0" anchor="ctr"/>
           <a:lstStyle/>
           <a:p>
-            <a:pPr algn="ctr" indent="0" marL="0">
+            <a:pPr marL="0" indent="0" algn="ctr">
               <a:buNone/>
             </a:pPr>
             <a:r>
@@ -8301,7 +8302,7 @@
           <a:bodyPr wrap="square" lIns="0" tIns="0" rIns="0" bIns="0" rtlCol="0" anchor="ctr"/>
           <a:lstStyle/>
           <a:p>
-            <a:pPr indent="0" marL="0">
+            <a:pPr marL="0" indent="0">
               <a:buNone/>
             </a:pPr>
             <a:r>
@@ -8365,7 +8366,7 @@
           <a:bodyPr wrap="square" lIns="0" tIns="0" rIns="0" bIns="0" rtlCol="0" anchor="ctr"/>
           <a:lstStyle/>
           <a:p>
-            <a:pPr algn="ctr" indent="0" marL="0">
+            <a:pPr marL="0" indent="0" algn="ctr">
               <a:buNone/>
             </a:pPr>
             <a:r>
@@ -8404,7 +8405,7 @@
           <a:bodyPr wrap="square" lIns="0" tIns="0" rIns="0" bIns="0" rtlCol="0" anchor="ctr"/>
           <a:lstStyle/>
           <a:p>
-            <a:pPr indent="0" marL="0">
+            <a:pPr marL="0" indent="0">
               <a:buNone/>
             </a:pPr>
             <a:r>
@@ -8468,7 +8469,7 @@
           <a:bodyPr wrap="square" lIns="0" tIns="0" rIns="0" bIns="0" rtlCol="0" anchor="ctr"/>
           <a:lstStyle/>
           <a:p>
-            <a:pPr algn="ctr" indent="0" marL="0">
+            <a:pPr marL="0" indent="0" algn="ctr">
               <a:buNone/>
             </a:pPr>
             <a:r>
@@ -8507,7 +8508,7 @@
           <a:bodyPr wrap="square" lIns="0" tIns="0" rIns="0" bIns="0" rtlCol="0" anchor="ctr"/>
           <a:lstStyle/>
           <a:p>
-            <a:pPr indent="0" marL="0">
+            <a:pPr marL="0" indent="0">
               <a:buNone/>
             </a:pPr>
             <a:r>
@@ -8571,7 +8572,7 @@
           <a:bodyPr wrap="square" lIns="0" tIns="0" rIns="0" bIns="0" rtlCol="0" anchor="ctr"/>
           <a:lstStyle/>
           <a:p>
-            <a:pPr algn="ctr" indent="0" marL="0">
+            <a:pPr marL="0" indent="0" algn="ctr">
               <a:buNone/>
             </a:pPr>
             <a:r>
@@ -8610,7 +8611,7 @@
           <a:bodyPr wrap="square" lIns="0" tIns="0" rIns="0" bIns="0" rtlCol="0" anchor="ctr"/>
           <a:lstStyle/>
           <a:p>
-            <a:pPr indent="0" marL="0">
+            <a:pPr marL="0" indent="0">
               <a:buNone/>
             </a:pPr>
             <a:r>
@@ -8680,7 +8681,7 @@
           <a:bodyPr wrap="square" lIns="0" tIns="0" rIns="0" bIns="0" rtlCol="0" anchor="ctr"/>
           <a:lstStyle/>
           <a:p>
-            <a:pPr algn="ctr" indent="0" marL="0">
+            <a:pPr marL="0" indent="0" algn="ctr">
               <a:buNone/>
             </a:pPr>
             <a:r>
@@ -8714,6 +8715,7 @@
         <a:solidFill>
           <a:srgbClr val="FFFFFF"/>
         </a:solidFill>
+        <a:effectLst/>
       </p:bgPr>
     </p:bg>
     <p:spTree>
@@ -8776,7 +8778,7 @@
           <a:bodyPr wrap="square" lIns="0" tIns="0" rIns="0" bIns="0" rtlCol="0" anchor="ctr"/>
           <a:lstStyle/>
           <a:p>
-            <a:pPr indent="0" marL="0">
+            <a:pPr marL="0" indent="0">
               <a:buNone/>
             </a:pPr>
             <a:r>
@@ -8842,7 +8844,7 @@
           <a:bodyPr wrap="square" lIns="0" tIns="0" rIns="0" bIns="0" rtlCol="0" anchor="ctr"/>
           <a:lstStyle/>
           <a:p>
-            <a:pPr algn="ctr" indent="0" marL="0">
+            <a:pPr marL="0" indent="0" algn="ctr">
               <a:buNone/>
             </a:pPr>
             <a:r>
@@ -8908,7 +8910,7 @@
           <a:bodyPr wrap="square" lIns="0" tIns="0" rIns="0" bIns="0" rtlCol="0" anchor="ctr"/>
           <a:lstStyle/>
           <a:p>
-            <a:pPr algn="ctr" indent="0" marL="0">
+            <a:pPr marL="0" indent="0" algn="ctr">
               <a:buNone/>
             </a:pPr>
             <a:r>
@@ -8952,7 +8954,7 @@
             <a:prstDash val="solid"/>
           </a:ln>
           <a:effectLst>
-            <a:outerShdw sx="100000" sy="100000" kx="0" ky="0" algn="bl" rotWithShape="0" blurRad="101600" dist="38100" dir="2700000">
+            <a:outerShdw blurRad="101600" dist="38100" dir="2700000" algn="bl" rotWithShape="0">
               <a:srgbClr val="000000">
                 <a:alpha val="12000"/>
               </a:srgbClr>
@@ -8981,7 +8983,7 @@
           <a:bodyPr wrap="square" lIns="0" tIns="0" rIns="0" bIns="0" rtlCol="0" anchor="ctr"/>
           <a:lstStyle/>
           <a:p>
-            <a:pPr indent="0" marL="0">
+            <a:pPr marL="0" indent="0">
               <a:buNone/>
             </a:pPr>
             <a:r>
@@ -9025,7 +9027,7 @@
             <a:prstDash val="solid"/>
           </a:ln>
           <a:effectLst>
-            <a:outerShdw sx="100000" sy="100000" kx="0" ky="0" algn="bl" rotWithShape="0" blurRad="101600" dist="38100" dir="2700000">
+            <a:outerShdw blurRad="101600" dist="38100" dir="2700000" algn="bl" rotWithShape="0">
               <a:srgbClr val="000000">
                 <a:alpha val="12000"/>
               </a:srgbClr>
@@ -9054,7 +9056,7 @@
           <a:bodyPr wrap="square" lIns="0" tIns="0" rIns="0" bIns="0" rtlCol="0" anchor="ctr"/>
           <a:lstStyle/>
           <a:p>
-            <a:pPr indent="0" marL="0">
+            <a:pPr marL="0" indent="0">
               <a:buNone/>
             </a:pPr>
             <a:r>
@@ -9093,7 +9095,7 @@
           <a:bodyPr wrap="square" lIns="0" tIns="0" rIns="0" bIns="0" rtlCol="0" anchor="ctr"/>
           <a:lstStyle/>
           <a:p>
-            <a:pPr indent="0" marL="0">
+            <a:pPr marL="0" indent="0">
               <a:buNone/>
             </a:pPr>
             <a:r>
@@ -9132,7 +9134,7 @@
           <a:bodyPr wrap="square" lIns="0" tIns="0" rIns="0" bIns="0" rtlCol="0" anchor="ctr"/>
           <a:lstStyle/>
           <a:p>
-            <a:pPr indent="0" marL="0">
+            <a:pPr marL="0" indent="0">
               <a:buNone/>
             </a:pPr>
             <a:r>
@@ -9171,7 +9173,7 @@
           <a:bodyPr wrap="square" lIns="0" tIns="0" rIns="0" bIns="0" rtlCol="0" anchor="ctr"/>
           <a:lstStyle/>
           <a:p>
-            <a:pPr indent="0" marL="0">
+            <a:pPr marL="0" indent="0">
               <a:buNone/>
             </a:pPr>
             <a:r>
@@ -9210,7 +9212,7 @@
           <a:bodyPr wrap="square" lIns="0" tIns="0" rIns="0" bIns="0" rtlCol="0" anchor="ctr"/>
           <a:lstStyle/>
           <a:p>
-            <a:pPr indent="0" marL="0">
+            <a:pPr marL="0" indent="0">
               <a:buNone/>
             </a:pPr>
             <a:r>
@@ -9249,7 +9251,7 @@
           <a:bodyPr wrap="square" lIns="0" tIns="0" rIns="0" bIns="0" rtlCol="0" anchor="ctr"/>
           <a:lstStyle/>
           <a:p>
-            <a:pPr indent="0" marL="0">
+            <a:pPr marL="0" indent="0">
               <a:buNone/>
             </a:pPr>
             <a:r>
@@ -9293,7 +9295,7 @@
             <a:prstDash val="solid"/>
           </a:ln>
           <a:effectLst>
-            <a:outerShdw sx="100000" sy="100000" kx="0" ky="0" algn="bl" rotWithShape="0" blurRad="101600" dist="38100" dir="2700000">
+            <a:outerShdw blurRad="101600" dist="38100" dir="2700000" algn="bl" rotWithShape="0">
               <a:srgbClr val="000000">
                 <a:alpha val="12000"/>
               </a:srgbClr>
@@ -9322,7 +9324,7 @@
           <a:bodyPr wrap="square" lIns="0" tIns="0" rIns="0" bIns="0" rtlCol="0" anchor="ctr"/>
           <a:lstStyle/>
           <a:p>
-            <a:pPr indent="0" marL="0">
+            <a:pPr marL="0" indent="0">
               <a:buNone/>
             </a:pPr>
             <a:r>
@@ -9361,7 +9363,7 @@
           <a:bodyPr wrap="square" lIns="0" tIns="0" rIns="0" bIns="0" rtlCol="0" anchor="ctr"/>
           <a:lstStyle/>
           <a:p>
-            <a:pPr indent="0" marL="0">
+            <a:pPr marL="0" indent="0">
               <a:buNone/>
             </a:pPr>
             <a:r>
@@ -9400,7 +9402,7 @@
           <a:bodyPr wrap="square" lIns="0" tIns="0" rIns="0" bIns="0" rtlCol="0" anchor="ctr"/>
           <a:lstStyle/>
           <a:p>
-            <a:pPr indent="0" marL="0">
+            <a:pPr marL="0" indent="0">
               <a:buNone/>
             </a:pPr>
             <a:r>
@@ -9439,7 +9441,7 @@
           <a:bodyPr wrap="square" lIns="0" tIns="0" rIns="0" bIns="0" rtlCol="0" anchor="ctr"/>
           <a:lstStyle/>
           <a:p>
-            <a:pPr indent="0" marL="0">
+            <a:pPr marL="0" indent="0">
               <a:buNone/>
             </a:pPr>
             <a:r>
@@ -9483,7 +9485,7 @@
             <a:prstDash val="solid"/>
           </a:ln>
           <a:effectLst>
-            <a:outerShdw sx="100000" sy="100000" kx="0" ky="0" algn="bl" rotWithShape="0" blurRad="101600" dist="38100" dir="2700000">
+            <a:outerShdw blurRad="101600" dist="38100" dir="2700000" algn="bl" rotWithShape="0">
               <a:srgbClr val="000000">
                 <a:alpha val="12000"/>
               </a:srgbClr>
@@ -9512,7 +9514,7 @@
           <a:bodyPr wrap="square" lIns="0" tIns="0" rIns="0" bIns="0" rtlCol="0" anchor="ctr"/>
           <a:lstStyle/>
           <a:p>
-            <a:pPr indent="0" marL="0">
+            <a:pPr marL="0" indent="0">
               <a:buNone/>
             </a:pPr>
             <a:r>
@@ -9551,7 +9553,7 @@
           <a:bodyPr wrap="square" lIns="0" tIns="0" rIns="0" bIns="0" rtlCol="0" anchor="ctr"/>
           <a:lstStyle/>
           <a:p>
-            <a:pPr indent="0" marL="0">
+            <a:pPr marL="0" indent="0">
               <a:buNone/>
             </a:pPr>
             <a:r>
@@ -9590,7 +9592,7 @@
           <a:bodyPr wrap="square" lIns="0" tIns="0" rIns="0" bIns="0" rtlCol="0" anchor="ctr"/>
           <a:lstStyle/>
           <a:p>
-            <a:pPr indent="0" marL="0">
+            <a:pPr marL="0" indent="0">
               <a:buNone/>
             </a:pPr>
             <a:r>
@@ -9629,7 +9631,7 @@
           <a:bodyPr wrap="square" lIns="0" tIns="0" rIns="0" bIns="0" rtlCol="0" anchor="ctr"/>
           <a:lstStyle/>
           <a:p>
-            <a:pPr indent="0" marL="0">
+            <a:pPr marL="0" indent="0">
               <a:buNone/>
             </a:pPr>
             <a:r>
@@ -9668,7 +9670,7 @@
           <a:bodyPr wrap="square" lIns="0" tIns="0" rIns="0" bIns="0" rtlCol="0" anchor="ctr"/>
           <a:lstStyle/>
           <a:p>
-            <a:pPr indent="0" marL="0">
+            <a:pPr marL="0" indent="0">
               <a:buNone/>
             </a:pPr>
             <a:r>
@@ -9712,7 +9714,7 @@
             <a:prstDash val="solid"/>
           </a:ln>
           <a:effectLst>
-            <a:outerShdw sx="100000" sy="100000" kx="0" ky="0" algn="bl" rotWithShape="0" blurRad="101600" dist="38100" dir="2700000">
+            <a:outerShdw blurRad="101600" dist="38100" dir="2700000" algn="bl" rotWithShape="0">
               <a:srgbClr val="000000">
                 <a:alpha val="12000"/>
               </a:srgbClr>
@@ -9741,7 +9743,7 @@
           <a:bodyPr wrap="square" lIns="0" tIns="0" rIns="0" bIns="0" rtlCol="0" anchor="ctr"/>
           <a:lstStyle/>
           <a:p>
-            <a:pPr indent="0" marL="0">
+            <a:pPr marL="0" indent="0">
               <a:buNone/>
             </a:pPr>
             <a:r>
@@ -9768,19 +9770,19 @@
         <p:spPr>
           <a:xfrm>
             <a:off x="457200" y="5212080"/>
-            <a:ext cx="8229600" cy="-137160"/>
-          </a:xfrm>
-          <a:prstGeom prst="rect">
-            <a:avLst/>
-          </a:prstGeom>
-          <a:noFill/>
-          <a:ln/>
-        </p:spPr>
-        <p:txBody>
-          <a:bodyPr wrap="square" lIns="0" tIns="0" rIns="0" bIns="0" rtlCol="0" anchor="ctr"/>
-          <a:lstStyle/>
-          <a:p>
-            <a:pPr indent="0" marL="0">
+            <a:ext cx="8229600" cy="0"/>
+          </a:xfrm>
+          <a:prstGeom prst="rect">
+            <a:avLst/>
+          </a:prstGeom>
+          <a:noFill/>
+          <a:ln/>
+        </p:spPr>
+        <p:txBody>
+          <a:bodyPr wrap="square" lIns="0" tIns="0" rIns="0" bIns="0" rtlCol="0" anchor="ctr"/>
+          <a:lstStyle/>
+          <a:p>
+            <a:pPr marL="0" indent="0">
               <a:buNone/>
             </a:pPr>
             <a:r>
@@ -9844,7 +9846,7 @@
           <a:bodyPr wrap="square" lIns="0" tIns="0" rIns="0" bIns="0" rtlCol="0" anchor="ctr"/>
           <a:lstStyle/>
           <a:p>
-            <a:pPr algn="ctr" indent="0" marL="0">
+            <a:pPr marL="0" indent="0" algn="ctr">
               <a:buNone/>
             </a:pPr>
             <a:r>
@@ -9878,6 +9880,7 @@
         <a:solidFill>
           <a:srgbClr val="FFFFFF"/>
         </a:solidFill>
+        <a:effectLst/>
       </p:bgPr>
     </p:bg>
     <p:spTree>
@@ -9940,7 +9943,7 @@
           <a:bodyPr wrap="square" lIns="0" tIns="0" rIns="0" bIns="0" rtlCol="0" anchor="ctr"/>
           <a:lstStyle/>
           <a:p>
-            <a:pPr indent="0" marL="0">
+            <a:pPr marL="0" indent="0">
               <a:buNone/>
             </a:pPr>
             <a:r>
@@ -10006,7 +10009,7 @@
           <a:bodyPr wrap="square" lIns="0" tIns="0" rIns="0" bIns="0" rtlCol="0" anchor="ctr"/>
           <a:lstStyle/>
           <a:p>
-            <a:pPr algn="ctr" indent="0" marL="0">
+            <a:pPr marL="0" indent="0" algn="ctr">
               <a:buNone/>
             </a:pPr>
             <a:r>
@@ -10072,7 +10075,7 @@
           <a:bodyPr wrap="square" lIns="0" tIns="0" rIns="0" bIns="0" rtlCol="0" anchor="ctr"/>
           <a:lstStyle/>
           <a:p>
-            <a:pPr algn="ctr" indent="0" marL="0">
+            <a:pPr marL="0" indent="0" algn="ctr">
               <a:buNone/>
             </a:pPr>
             <a:r>
@@ -10136,7 +10139,7 @@
           <a:bodyPr wrap="square" lIns="0" tIns="0" rIns="0" bIns="0" rtlCol="0" anchor="ctr"/>
           <a:lstStyle/>
           <a:p>
-            <a:pPr indent="0" marL="0">
+            <a:pPr marL="0" indent="0">
               <a:buNone/>
             </a:pPr>
             <a:r>
@@ -10175,7 +10178,7 @@
           <a:bodyPr wrap="square" lIns="0" tIns="0" rIns="0" bIns="0" rtlCol="0" anchor="ctr"/>
           <a:lstStyle/>
           <a:p>
-            <a:pPr indent="0" marL="0">
+            <a:pPr marL="0" indent="0">
               <a:buNone/>
             </a:pPr>
             <a:r>
@@ -10214,7 +10217,7 @@
           <a:bodyPr wrap="square" lIns="0" tIns="0" rIns="0" bIns="0" rtlCol="0" anchor="ctr"/>
           <a:lstStyle/>
           <a:p>
-            <a:pPr indent="0" marL="0">
+            <a:pPr marL="0" indent="0">
               <a:buNone/>
             </a:pPr>
             <a:r>
@@ -10278,7 +10281,7 @@
           <a:bodyPr wrap="square" lIns="0" tIns="0" rIns="0" bIns="0" rtlCol="0" anchor="ctr"/>
           <a:lstStyle/>
           <a:p>
-            <a:pPr indent="0" marL="0">
+            <a:pPr marL="0" indent="0">
               <a:buNone/>
             </a:pPr>
             <a:r>
@@ -10317,7 +10320,7 @@
           <a:bodyPr wrap="square" lIns="0" tIns="0" rIns="0" bIns="0" rtlCol="0" anchor="ctr"/>
           <a:lstStyle/>
           <a:p>
-            <a:pPr indent="0" marL="0">
+            <a:pPr marL="0" indent="0">
               <a:buNone/>
             </a:pPr>
             <a:r>
@@ -10356,7 +10359,7 @@
           <a:bodyPr wrap="square" lIns="0" tIns="0" rIns="0" bIns="0" rtlCol="0" anchor="ctr"/>
           <a:lstStyle/>
           <a:p>
-            <a:pPr indent="0" marL="0">
+            <a:pPr marL="0" indent="0">
               <a:buNone/>
             </a:pPr>
             <a:r>
@@ -10420,7 +10423,7 @@
           <a:bodyPr wrap="square" lIns="0" tIns="0" rIns="0" bIns="0" rtlCol="0" anchor="ctr"/>
           <a:lstStyle/>
           <a:p>
-            <a:pPr indent="0" marL="0">
+            <a:pPr marL="0" indent="0">
               <a:buNone/>
             </a:pPr>
             <a:r>
@@ -10459,7 +10462,7 @@
           <a:bodyPr wrap="square" lIns="0" tIns="0" rIns="0" bIns="0" rtlCol="0" anchor="ctr"/>
           <a:lstStyle/>
           <a:p>
-            <a:pPr indent="0" marL="0">
+            <a:pPr marL="0" indent="0">
               <a:buNone/>
             </a:pPr>
             <a:r>
@@ -10498,7 +10501,7 @@
           <a:bodyPr wrap="square" lIns="0" tIns="0" rIns="0" bIns="0" rtlCol="0" anchor="ctr"/>
           <a:lstStyle/>
           <a:p>
-            <a:pPr indent="0" marL="0">
+            <a:pPr marL="0" indent="0">
               <a:buNone/>
             </a:pPr>
             <a:r>
@@ -10562,7 +10565,7 @@
           <a:bodyPr wrap="square" lIns="0" tIns="0" rIns="0" bIns="0" rtlCol="0" anchor="ctr"/>
           <a:lstStyle/>
           <a:p>
-            <a:pPr indent="0" marL="0">
+            <a:pPr marL="0" indent="0">
               <a:buNone/>
             </a:pPr>
             <a:r>
@@ -10601,7 +10604,7 @@
           <a:bodyPr wrap="square" lIns="0" tIns="0" rIns="0" bIns="0" rtlCol="0" anchor="ctr"/>
           <a:lstStyle/>
           <a:p>
-            <a:pPr indent="0" marL="0">
+            <a:pPr marL="0" indent="0">
               <a:buNone/>
             </a:pPr>
             <a:r>
@@ -10640,7 +10643,7 @@
           <a:bodyPr wrap="square" lIns="0" tIns="0" rIns="0" bIns="0" rtlCol="0" anchor="ctr"/>
           <a:lstStyle/>
           <a:p>
-            <a:pPr indent="0" marL="0">
+            <a:pPr marL="0" indent="0">
               <a:buNone/>
             </a:pPr>
             <a:r>
@@ -10704,7 +10707,7 @@
           <a:bodyPr wrap="square" lIns="0" tIns="0" rIns="0" bIns="0" rtlCol="0" anchor="ctr"/>
           <a:lstStyle/>
           <a:p>
-            <a:pPr indent="0" marL="0">
+            <a:pPr marL="0" indent="0">
               <a:buNone/>
             </a:pPr>
             <a:r>
@@ -10743,7 +10746,7 @@
           <a:bodyPr wrap="square" lIns="0" tIns="0" rIns="0" bIns="0" rtlCol="0" anchor="ctr"/>
           <a:lstStyle/>
           <a:p>
-            <a:pPr indent="0" marL="0">
+            <a:pPr marL="0" indent="0">
               <a:buNone/>
             </a:pPr>
             <a:r>
@@ -10782,7 +10785,7 @@
           <a:bodyPr wrap="square" lIns="0" tIns="0" rIns="0" bIns="0" rtlCol="0" anchor="ctr"/>
           <a:lstStyle/>
           <a:p>
-            <a:pPr indent="0" marL="0">
+            <a:pPr marL="0" indent="0">
               <a:buNone/>
             </a:pPr>
             <a:r>
@@ -10846,7 +10849,7 @@
           <a:bodyPr wrap="square" lIns="0" tIns="0" rIns="0" bIns="0" rtlCol="0" anchor="ctr"/>
           <a:lstStyle/>
           <a:p>
-            <a:pPr indent="0" marL="0">
+            <a:pPr marL="0" indent="0">
               <a:buNone/>
             </a:pPr>
             <a:r>
@@ -10885,7 +10888,7 @@
           <a:bodyPr wrap="square" lIns="0" tIns="0" rIns="0" bIns="0" rtlCol="0" anchor="ctr"/>
           <a:lstStyle/>
           <a:p>
-            <a:pPr indent="0" marL="0">
+            <a:pPr marL="0" indent="0">
               <a:buNone/>
             </a:pPr>
             <a:r>
@@ -10924,7 +10927,7 @@
           <a:bodyPr wrap="square" lIns="0" tIns="0" rIns="0" bIns="0" rtlCol="0" anchor="ctr"/>
           <a:lstStyle/>
           <a:p>
-            <a:pPr indent="0" marL="0">
+            <a:pPr marL="0" indent="0">
               <a:buNone/>
             </a:pPr>
             <a:r>
@@ -10988,7 +10991,7 @@
           <a:bodyPr wrap="square" lIns="0" tIns="0" rIns="0" bIns="0" rtlCol="0" anchor="ctr"/>
           <a:lstStyle/>
           <a:p>
-            <a:pPr indent="0" marL="0">
+            <a:pPr marL="0" indent="0">
               <a:buNone/>
             </a:pPr>
             <a:r>
@@ -11027,7 +11030,7 @@
           <a:bodyPr wrap="square" lIns="0" tIns="0" rIns="0" bIns="0" rtlCol="0" anchor="ctr"/>
           <a:lstStyle/>
           <a:p>
-            <a:pPr indent="0" marL="0">
+            <a:pPr marL="0" indent="0">
               <a:buNone/>
             </a:pPr>
             <a:r>
@@ -11066,7 +11069,7 @@
           <a:bodyPr wrap="square" lIns="0" tIns="0" rIns="0" bIns="0" rtlCol="0" anchor="ctr"/>
           <a:lstStyle/>
           <a:p>
-            <a:pPr indent="0" marL="0">
+            <a:pPr marL="0" indent="0">
               <a:buNone/>
             </a:pPr>
             <a:r>
@@ -11130,7 +11133,7 @@
           <a:bodyPr wrap="square" lIns="0" tIns="0" rIns="0" bIns="0" rtlCol="0" anchor="ctr"/>
           <a:lstStyle/>
           <a:p>
-            <a:pPr algn="ctr" indent="0" marL="0">
+            <a:pPr marL="0" indent="0" algn="ctr">
               <a:buNone/>
             </a:pPr>
             <a:r>
@@ -11164,6 +11167,7 @@
         <a:solidFill>
           <a:srgbClr val="FFFFFF"/>
         </a:solidFill>
+        <a:effectLst/>
       </p:bgPr>
     </p:bg>
     <p:spTree>
@@ -11226,7 +11230,7 @@
           <a:bodyPr wrap="square" lIns="0" tIns="0" rIns="0" bIns="0" rtlCol="0" anchor="ctr"/>
           <a:lstStyle/>
           <a:p>
-            <a:pPr indent="0" marL="0">
+            <a:pPr marL="0" indent="0">
               <a:buNone/>
             </a:pPr>
             <a:r>
@@ -11292,7 +11296,7 @@
           <a:bodyPr wrap="square" lIns="0" tIns="0" rIns="0" bIns="0" rtlCol="0" anchor="ctr"/>
           <a:lstStyle/>
           <a:p>
-            <a:pPr algn="ctr" indent="0" marL="0">
+            <a:pPr marL="0" indent="0" algn="ctr">
               <a:buNone/>
             </a:pPr>
             <a:r>
@@ -11336,7 +11340,7 @@
             <a:prstDash val="solid"/>
           </a:ln>
           <a:effectLst>
-            <a:outerShdw sx="100000" sy="100000" kx="0" ky="0" algn="bl" rotWithShape="0" blurRad="101600" dist="38100" dir="2700000">
+            <a:outerShdw blurRad="101600" dist="38100" dir="2700000" algn="bl" rotWithShape="0">
               <a:srgbClr val="000000">
                 <a:alpha val="12000"/>
               </a:srgbClr>
@@ -11392,7 +11396,7 @@
           <a:bodyPr wrap="square" lIns="0" tIns="0" rIns="0" bIns="0" rtlCol="0" anchor="ctr"/>
           <a:lstStyle/>
           <a:p>
-            <a:pPr algn="ctr" indent="0" marL="0">
+            <a:pPr marL="0" indent="0" algn="ctr">
               <a:buNone/>
             </a:pPr>
             <a:r>
@@ -11431,7 +11435,7 @@
           <a:bodyPr wrap="square" lIns="0" tIns="0" rIns="0" bIns="0" rtlCol="0" anchor="ctr"/>
           <a:lstStyle/>
           <a:p>
-            <a:pPr indent="0" marL="0">
+            <a:pPr marL="0" indent="0">
               <a:buNone/>
             </a:pPr>
             <a:r>
@@ -11470,7 +11474,7 @@
           <a:bodyPr wrap="square" lIns="0" tIns="0" rIns="0" bIns="0" rtlCol="0" anchor="ctr"/>
           <a:lstStyle/>
           <a:p>
-            <a:pPr indent="0" marL="0">
+            <a:pPr marL="0" indent="0">
               <a:buNone/>
             </a:pPr>
             <a:r>
@@ -11509,7 +11513,7 @@
           <a:bodyPr wrap="square" lIns="0" tIns="0" rIns="0" bIns="0" rtlCol="0" anchor="ctr"/>
           <a:lstStyle/>
           <a:p>
-            <a:pPr indent="0" marL="0">
+            <a:pPr marL="0" indent="0">
               <a:buNone/>
             </a:pPr>
             <a:r>
@@ -11548,7 +11552,7 @@
           <a:bodyPr wrap="square" lIns="0" tIns="0" rIns="0" bIns="0" rtlCol="0" anchor="ctr"/>
           <a:lstStyle/>
           <a:p>
-            <a:pPr indent="0" marL="0">
+            <a:pPr marL="0" indent="0">
               <a:buNone/>
             </a:pPr>
             <a:r>
@@ -11592,7 +11596,7 @@
             <a:prstDash val="solid"/>
           </a:ln>
           <a:effectLst>
-            <a:outerShdw sx="100000" sy="100000" kx="0" ky="0" algn="bl" rotWithShape="0" blurRad="101600" dist="38100" dir="2700000">
+            <a:outerShdw blurRad="101600" dist="38100" dir="2700000" algn="bl" rotWithShape="0">
               <a:srgbClr val="000000">
                 <a:alpha val="12000"/>
               </a:srgbClr>
@@ -11648,7 +11652,7 @@
           <a:bodyPr wrap="square" lIns="0" tIns="0" rIns="0" bIns="0" rtlCol="0" anchor="ctr"/>
           <a:lstStyle/>
           <a:p>
-            <a:pPr algn="ctr" indent="0" marL="0">
+            <a:pPr marL="0" indent="0" algn="ctr">
               <a:buNone/>
             </a:pPr>
             <a:r>
@@ -11687,7 +11691,7 @@
           <a:bodyPr wrap="square" lIns="0" tIns="0" rIns="0" bIns="0" rtlCol="0" anchor="ctr"/>
           <a:lstStyle/>
           <a:p>
-            <a:pPr indent="0" marL="0">
+            <a:pPr marL="0" indent="0">
               <a:buNone/>
             </a:pPr>
             <a:r>
@@ -11726,7 +11730,7 @@
           <a:bodyPr wrap="square" lIns="0" tIns="0" rIns="0" bIns="0" rtlCol="0" anchor="ctr"/>
           <a:lstStyle/>
           <a:p>
-            <a:pPr indent="0" marL="0">
+            <a:pPr marL="0" indent="0">
               <a:buNone/>
             </a:pPr>
             <a:r>
@@ -11765,7 +11769,7 @@
           <a:bodyPr wrap="square" lIns="0" tIns="0" rIns="0" bIns="0" rtlCol="0" anchor="ctr"/>
           <a:lstStyle/>
           <a:p>
-            <a:pPr indent="0" marL="0">
+            <a:pPr marL="0" indent="0">
               <a:buNone/>
             </a:pPr>
             <a:r>
@@ -11804,7 +11808,7 @@
           <a:bodyPr wrap="square" lIns="0" tIns="0" rIns="0" bIns="0" rtlCol="0" anchor="ctr"/>
           <a:lstStyle/>
           <a:p>
-            <a:pPr indent="0" marL="0">
+            <a:pPr marL="0" indent="0">
               <a:buNone/>
             </a:pPr>
             <a:r>
@@ -11848,7 +11852,7 @@
             <a:prstDash val="solid"/>
           </a:ln>
           <a:effectLst>
-            <a:outerShdw sx="100000" sy="100000" kx="0" ky="0" algn="bl" rotWithShape="0" blurRad="101600" dist="38100" dir="2700000">
+            <a:outerShdw blurRad="101600" dist="38100" dir="2700000" algn="bl" rotWithShape="0">
               <a:srgbClr val="000000">
                 <a:alpha val="12000"/>
               </a:srgbClr>
@@ -11904,7 +11908,7 @@
           <a:bodyPr wrap="square" lIns="0" tIns="0" rIns="0" bIns="0" rtlCol="0" anchor="ctr"/>
           <a:lstStyle/>
           <a:p>
-            <a:pPr algn="ctr" indent="0" marL="0">
+            <a:pPr marL="0" indent="0" algn="ctr">
               <a:buNone/>
             </a:pPr>
             <a:r>
@@ -11943,7 +11947,7 @@
           <a:bodyPr wrap="square" lIns="0" tIns="0" rIns="0" bIns="0" rtlCol="0" anchor="ctr"/>
           <a:lstStyle/>
           <a:p>
-            <a:pPr indent="0" marL="0">
+            <a:pPr marL="0" indent="0">
               <a:buNone/>
             </a:pPr>
             <a:r>
@@ -11982,7 +11986,7 @@
           <a:bodyPr wrap="square" lIns="0" tIns="0" rIns="0" bIns="0" rtlCol="0" anchor="ctr"/>
           <a:lstStyle/>
           <a:p>
-            <a:pPr indent="0" marL="0">
+            <a:pPr marL="0" indent="0">
               <a:buNone/>
             </a:pPr>
             <a:r>
@@ -12021,7 +12025,7 @@
           <a:bodyPr wrap="square" lIns="0" tIns="0" rIns="0" bIns="0" rtlCol="0" anchor="ctr"/>
           <a:lstStyle/>
           <a:p>
-            <a:pPr indent="0" marL="0">
+            <a:pPr marL="0" indent="0">
               <a:buNone/>
             </a:pPr>
             <a:r>
@@ -12060,7 +12064,7 @@
           <a:bodyPr wrap="square" lIns="0" tIns="0" rIns="0" bIns="0" rtlCol="0" anchor="ctr"/>
           <a:lstStyle/>
           <a:p>
-            <a:pPr indent="0" marL="0">
+            <a:pPr marL="0" indent="0">
               <a:buNone/>
             </a:pPr>
             <a:r>
@@ -12104,7 +12108,7 @@
             <a:prstDash val="solid"/>
           </a:ln>
           <a:effectLst>
-            <a:outerShdw sx="100000" sy="100000" kx="0" ky="0" algn="bl" rotWithShape="0" blurRad="101600" dist="38100" dir="2700000">
+            <a:outerShdw blurRad="101600" dist="38100" dir="2700000" algn="bl" rotWithShape="0">
               <a:srgbClr val="000000">
                 <a:alpha val="12000"/>
               </a:srgbClr>
@@ -12160,7 +12164,7 @@
           <a:bodyPr wrap="square" lIns="0" tIns="0" rIns="0" bIns="0" rtlCol="0" anchor="ctr"/>
           <a:lstStyle/>
           <a:p>
-            <a:pPr algn="ctr" indent="0" marL="0">
+            <a:pPr marL="0" indent="0" algn="ctr">
               <a:buNone/>
             </a:pPr>
             <a:r>
@@ -12199,7 +12203,7 @@
           <a:bodyPr wrap="square" lIns="0" tIns="0" rIns="0" bIns="0" rtlCol="0" anchor="ctr"/>
           <a:lstStyle/>
           <a:p>
-            <a:pPr indent="0" marL="0">
+            <a:pPr marL="0" indent="0">
               <a:buNone/>
             </a:pPr>
             <a:r>
@@ -12238,7 +12242,7 @@
           <a:bodyPr wrap="square" lIns="0" tIns="0" rIns="0" bIns="0" rtlCol="0" anchor="ctr"/>
           <a:lstStyle/>
           <a:p>
-            <a:pPr indent="0" marL="0">
+            <a:pPr marL="0" indent="0">
               <a:buNone/>
             </a:pPr>
             <a:r>
@@ -12277,7 +12281,7 @@
           <a:bodyPr wrap="square" lIns="0" tIns="0" rIns="0" bIns="0" rtlCol="0" anchor="ctr"/>
           <a:lstStyle/>
           <a:p>
-            <a:pPr indent="0" marL="0">
+            <a:pPr marL="0" indent="0">
               <a:buNone/>
             </a:pPr>
             <a:r>
@@ -12316,7 +12320,7 @@
           <a:bodyPr wrap="square" lIns="0" tIns="0" rIns="0" bIns="0" rtlCol="0" anchor="ctr"/>
           <a:lstStyle/>
           <a:p>
-            <a:pPr indent="0" marL="0">
+            <a:pPr marL="0" indent="0">
               <a:buNone/>
             </a:pPr>
             <a:r>
@@ -12360,7 +12364,7 @@
             <a:prstDash val="solid"/>
           </a:ln>
           <a:effectLst>
-            <a:outerShdw sx="100000" sy="100000" kx="0" ky="0" algn="bl" rotWithShape="0" blurRad="101600" dist="38100" dir="2700000">
+            <a:outerShdw blurRad="101600" dist="38100" dir="2700000" algn="bl" rotWithShape="0">
               <a:srgbClr val="000000">
                 <a:alpha val="12000"/>
               </a:srgbClr>
@@ -12416,7 +12420,7 @@
           <a:bodyPr wrap="square" lIns="0" tIns="0" rIns="0" bIns="0" rtlCol="0" anchor="ctr"/>
           <a:lstStyle/>
           <a:p>
-            <a:pPr algn="ctr" indent="0" marL="0">
+            <a:pPr marL="0" indent="0" algn="ctr">
               <a:buNone/>
             </a:pPr>
             <a:r>
@@ -12455,7 +12459,7 @@
           <a:bodyPr wrap="square" lIns="0" tIns="0" rIns="0" bIns="0" rtlCol="0" anchor="ctr"/>
           <a:lstStyle/>
           <a:p>
-            <a:pPr indent="0" marL="0">
+            <a:pPr marL="0" indent="0">
               <a:buNone/>
             </a:pPr>
             <a:r>
@@ -12494,7 +12498,7 @@
           <a:bodyPr wrap="square" lIns="0" tIns="0" rIns="0" bIns="0" rtlCol="0" anchor="ctr"/>
           <a:lstStyle/>
           <a:p>
-            <a:pPr indent="0" marL="0">
+            <a:pPr marL="0" indent="0">
               <a:buNone/>
             </a:pPr>
             <a:r>
@@ -12533,7 +12537,7 @@
           <a:bodyPr wrap="square" lIns="0" tIns="0" rIns="0" bIns="0" rtlCol="0" anchor="ctr"/>
           <a:lstStyle/>
           <a:p>
-            <a:pPr indent="0" marL="0">
+            <a:pPr marL="0" indent="0">
               <a:buNone/>
             </a:pPr>
             <a:r>
@@ -12572,7 +12576,7 @@
           <a:bodyPr wrap="square" lIns="0" tIns="0" rIns="0" bIns="0" rtlCol="0" anchor="ctr"/>
           <a:lstStyle/>
           <a:p>
-            <a:pPr indent="0" marL="0">
+            <a:pPr marL="0" indent="0">
               <a:buNone/>
             </a:pPr>
             <a:r>
@@ -12616,7 +12620,7 @@
             <a:prstDash val="solid"/>
           </a:ln>
           <a:effectLst>
-            <a:outerShdw sx="100000" sy="100000" kx="0" ky="0" algn="bl" rotWithShape="0" blurRad="101600" dist="38100" dir="2700000">
+            <a:outerShdw blurRad="101600" dist="38100" dir="2700000" algn="bl" rotWithShape="0">
               <a:srgbClr val="000000">
                 <a:alpha val="12000"/>
               </a:srgbClr>
@@ -12672,7 +12676,7 @@
           <a:bodyPr wrap="square" lIns="0" tIns="0" rIns="0" bIns="0" rtlCol="0" anchor="ctr"/>
           <a:lstStyle/>
           <a:p>
-            <a:pPr algn="ctr" indent="0" marL="0">
+            <a:pPr marL="0" indent="0" algn="ctr">
               <a:buNone/>
             </a:pPr>
             <a:r>
@@ -12711,7 +12715,7 @@
           <a:bodyPr wrap="square" lIns="0" tIns="0" rIns="0" bIns="0" rtlCol="0" anchor="ctr"/>
           <a:lstStyle/>
           <a:p>
-            <a:pPr indent="0" marL="0">
+            <a:pPr marL="0" indent="0">
               <a:buNone/>
             </a:pPr>
             <a:r>
@@ -12750,7 +12754,7 @@
           <a:bodyPr wrap="square" lIns="0" tIns="0" rIns="0" bIns="0" rtlCol="0" anchor="ctr"/>
           <a:lstStyle/>
           <a:p>
-            <a:pPr indent="0" marL="0">
+            <a:pPr marL="0" indent="0">
               <a:buNone/>
             </a:pPr>
             <a:r>
@@ -12789,7 +12793,7 @@
           <a:bodyPr wrap="square" lIns="0" tIns="0" rIns="0" bIns="0" rtlCol="0" anchor="ctr"/>
           <a:lstStyle/>
           <a:p>
-            <a:pPr indent="0" marL="0">
+            <a:pPr marL="0" indent="0">
               <a:buNone/>
             </a:pPr>
             <a:r>
@@ -12828,7 +12832,7 @@
           <a:bodyPr wrap="square" lIns="0" tIns="0" rIns="0" bIns="0" rtlCol="0" anchor="ctr"/>
           <a:lstStyle/>
           <a:p>
-            <a:pPr indent="0" marL="0">
+            <a:pPr marL="0" indent="0">
               <a:buNone/>
             </a:pPr>
             <a:r>
@@ -12892,7 +12896,7 @@
           <a:bodyPr wrap="square" lIns="0" tIns="0" rIns="0" bIns="0" rtlCol="0" anchor="ctr"/>
           <a:lstStyle/>
           <a:p>
-            <a:pPr algn="ctr" indent="0" marL="0">
+            <a:pPr marL="0" indent="0" algn="ctr">
               <a:buNone/>
             </a:pPr>
             <a:r>
@@ -12926,6 +12930,7 @@
         <a:solidFill>
           <a:srgbClr val="FFFFFF"/>
         </a:solidFill>
+        <a:effectLst/>
       </p:bgPr>
     </p:bg>
     <p:spTree>
@@ -12988,7 +12993,7 @@
           <a:bodyPr wrap="square" lIns="0" tIns="0" rIns="0" bIns="0" rtlCol="0" anchor="ctr"/>
           <a:lstStyle/>
           <a:p>
-            <a:pPr indent="0" marL="0">
+            <a:pPr marL="0" indent="0">
               <a:buNone/>
             </a:pPr>
             <a:r>
@@ -13054,7 +13059,7 @@
           <a:bodyPr wrap="square" lIns="0" tIns="0" rIns="0" bIns="0" rtlCol="0" anchor="ctr"/>
           <a:lstStyle/>
           <a:p>
-            <a:pPr algn="ctr" indent="0" marL="0">
+            <a:pPr marL="0" indent="0" algn="ctr">
               <a:buNone/>
             </a:pPr>
             <a:r>
@@ -13098,7 +13103,7 @@
             <a:prstDash val="solid"/>
           </a:ln>
           <a:effectLst>
-            <a:outerShdw sx="100000" sy="100000" kx="0" ky="0" algn="bl" rotWithShape="0" blurRad="101600" dist="38100" dir="2700000">
+            <a:outerShdw blurRad="101600" dist="38100" dir="2700000" algn="bl" rotWithShape="0">
               <a:srgbClr val="000000">
                 <a:alpha val="12000"/>
               </a:srgbClr>
@@ -13154,7 +13159,7 @@
           <a:bodyPr wrap="square" lIns="0" tIns="0" rIns="0" bIns="0" rtlCol="0" anchor="ctr"/>
           <a:lstStyle/>
           <a:p>
-            <a:pPr algn="ctr" indent="0" marL="0">
+            <a:pPr marL="0" indent="0" algn="ctr">
               <a:buNone/>
             </a:pPr>
             <a:r>
@@ -13193,7 +13198,7 @@
           <a:bodyPr wrap="square" lIns="0" tIns="0" rIns="0" bIns="0" rtlCol="0" anchor="ctr"/>
           <a:lstStyle/>
           <a:p>
-            <a:pPr indent="0" marL="0">
+            <a:pPr marL="0" indent="0">
               <a:buNone/>
             </a:pPr>
             <a:r>
@@ -13232,7 +13237,7 @@
           <a:bodyPr wrap="square" lIns="0" tIns="0" rIns="0" bIns="0" rtlCol="0" anchor="ctr"/>
           <a:lstStyle/>
           <a:p>
-            <a:pPr indent="0" marL="0">
+            <a:pPr marL="0" indent="0">
               <a:buNone/>
             </a:pPr>
             <a:r>
@@ -13271,7 +13276,7 @@
           <a:bodyPr wrap="square" lIns="0" tIns="0" rIns="0" bIns="0" rtlCol="0" anchor="ctr"/>
           <a:lstStyle/>
           <a:p>
-            <a:pPr indent="0" marL="0">
+            <a:pPr marL="0" indent="0">
               <a:buNone/>
             </a:pPr>
             <a:r>
@@ -13310,7 +13315,7 @@
           <a:bodyPr wrap="square" lIns="0" tIns="0" rIns="0" bIns="0" rtlCol="0" anchor="ctr"/>
           <a:lstStyle/>
           <a:p>
-            <a:pPr indent="0" marL="0">
+            <a:pPr marL="0" indent="0">
               <a:buNone/>
             </a:pPr>
             <a:r>
@@ -13349,7 +13354,7 @@
           <a:bodyPr wrap="square" lIns="0" tIns="0" rIns="0" bIns="0" rtlCol="0" anchor="ctr"/>
           <a:lstStyle/>
           <a:p>
-            <a:pPr indent="0" marL="0">
+            <a:pPr marL="0" indent="0">
               <a:buNone/>
             </a:pPr>
             <a:r>
@@ -13388,7 +13393,7 @@
           <a:bodyPr wrap="square" lIns="0" tIns="0" rIns="0" bIns="0" rtlCol="0" anchor="ctr"/>
           <a:lstStyle/>
           <a:p>
-            <a:pPr algn="ctr" indent="0" marL="0">
+            <a:pPr marL="0" indent="0" algn="ctr">
               <a:buNone/>
             </a:pPr>
             <a:r>
@@ -13429,7 +13434,7 @@
             <a:prstDash val="solid"/>
           </a:ln>
           <a:effectLst>
-            <a:outerShdw sx="100000" sy="100000" kx="0" ky="0" algn="bl" rotWithShape="0" blurRad="101600" dist="38100" dir="2700000">
+            <a:outerShdw blurRad="101600" dist="38100" dir="2700000" algn="bl" rotWithShape="0">
               <a:srgbClr val="000000">
                 <a:alpha val="12000"/>
               </a:srgbClr>
@@ -13485,7 +13490,7 @@
           <a:bodyPr wrap="square" lIns="0" tIns="0" rIns="0" bIns="0" rtlCol="0" anchor="ctr"/>
           <a:lstStyle/>
           <a:p>
-            <a:pPr algn="ctr" indent="0" marL="0">
+            <a:pPr marL="0" indent="0" algn="ctr">
               <a:buNone/>
             </a:pPr>
             <a:r>
@@ -13524,7 +13529,7 @@
           <a:bodyPr wrap="square" lIns="0" tIns="0" rIns="0" bIns="0" rtlCol="0" anchor="ctr"/>
           <a:lstStyle/>
           <a:p>
-            <a:pPr indent="0" marL="0">
+            <a:pPr marL="0" indent="0">
               <a:buNone/>
             </a:pPr>
             <a:r>
@@ -13563,7 +13568,7 @@
           <a:bodyPr wrap="square" lIns="0" tIns="0" rIns="0" bIns="0" rtlCol="0" anchor="ctr"/>
           <a:lstStyle/>
           <a:p>
-            <a:pPr indent="0" marL="0">
+            <a:pPr marL="0" indent="0">
               <a:buNone/>
             </a:pPr>
             <a:r>
@@ -13602,7 +13607,7 @@
           <a:bodyPr wrap="square" lIns="0" tIns="0" rIns="0" bIns="0" rtlCol="0" anchor="ctr"/>
           <a:lstStyle/>
           <a:p>
-            <a:pPr indent="0" marL="0">
+            <a:pPr marL="0" indent="0">
               <a:buNone/>
             </a:pPr>
             <a:r>
@@ -13641,7 +13646,7 @@
           <a:bodyPr wrap="square" lIns="0" tIns="0" rIns="0" bIns="0" rtlCol="0" anchor="ctr"/>
           <a:lstStyle/>
           <a:p>
-            <a:pPr indent="0" marL="0">
+            <a:pPr marL="0" indent="0">
               <a:buNone/>
             </a:pPr>
             <a:r>
@@ -13680,7 +13685,7 @@
           <a:bodyPr wrap="square" lIns="0" tIns="0" rIns="0" bIns="0" rtlCol="0" anchor="ctr"/>
           <a:lstStyle/>
           <a:p>
-            <a:pPr indent="0" marL="0">
+            <a:pPr marL="0" indent="0">
               <a:buNone/>
             </a:pPr>
             <a:r>
@@ -13719,7 +13724,7 @@
           <a:bodyPr wrap="square" lIns="0" tIns="0" rIns="0" bIns="0" rtlCol="0" anchor="ctr"/>
           <a:lstStyle/>
           <a:p>
-            <a:pPr algn="ctr" indent="0" marL="0">
+            <a:pPr marL="0" indent="0" algn="ctr">
               <a:buNone/>
             </a:pPr>
             <a:r>
@@ -13760,7 +13765,7 @@
             <a:prstDash val="solid"/>
           </a:ln>
           <a:effectLst>
-            <a:outerShdw sx="100000" sy="100000" kx="0" ky="0" algn="bl" rotWithShape="0" blurRad="101600" dist="38100" dir="2700000">
+            <a:outerShdw blurRad="101600" dist="38100" dir="2700000" algn="bl" rotWithShape="0">
               <a:srgbClr val="000000">
                 <a:alpha val="12000"/>
               </a:srgbClr>
@@ -13816,7 +13821,7 @@
           <a:bodyPr wrap="square" lIns="0" tIns="0" rIns="0" bIns="0" rtlCol="0" anchor="ctr"/>
           <a:lstStyle/>
           <a:p>
-            <a:pPr algn="ctr" indent="0" marL="0">
+            <a:pPr marL="0" indent="0" algn="ctr">
               <a:buNone/>
             </a:pPr>
             <a:r>
@@ -13855,7 +13860,7 @@
           <a:bodyPr wrap="square" lIns="0" tIns="0" rIns="0" bIns="0" rtlCol="0" anchor="ctr"/>
           <a:lstStyle/>
           <a:p>
-            <a:pPr indent="0" marL="0">
+            <a:pPr marL="0" indent="0">
               <a:buNone/>
             </a:pPr>
             <a:r>
@@ -13894,7 +13899,7 @@
           <a:bodyPr wrap="square" lIns="0" tIns="0" rIns="0" bIns="0" rtlCol="0" anchor="ctr"/>
           <a:lstStyle/>
           <a:p>
-            <a:pPr indent="0" marL="0">
+            <a:pPr marL="0" indent="0">
               <a:buNone/>
             </a:pPr>
             <a:r>
@@ -13933,7 +13938,7 @@
           <a:bodyPr wrap="square" lIns="0" tIns="0" rIns="0" bIns="0" rtlCol="0" anchor="ctr"/>
           <a:lstStyle/>
           <a:p>
-            <a:pPr indent="0" marL="0">
+            <a:pPr marL="0" indent="0">
               <a:buNone/>
             </a:pPr>
             <a:r>
@@ -13972,7 +13977,7 @@
           <a:bodyPr wrap="square" lIns="0" tIns="0" rIns="0" bIns="0" rtlCol="0" anchor="ctr"/>
           <a:lstStyle/>
           <a:p>
-            <a:pPr indent="0" marL="0">
+            <a:pPr marL="0" indent="0">
               <a:buNone/>
             </a:pPr>
             <a:r>
@@ -14011,7 +14016,7 @@
           <a:bodyPr wrap="square" lIns="0" tIns="0" rIns="0" bIns="0" rtlCol="0" anchor="ctr"/>
           <a:lstStyle/>
           <a:p>
-            <a:pPr indent="0" marL="0">
+            <a:pPr marL="0" indent="0">
               <a:buNone/>
             </a:pPr>
             <a:r>
@@ -14050,7 +14055,7 @@
           <a:bodyPr wrap="square" lIns="0" tIns="0" rIns="0" bIns="0" rtlCol="0" anchor="ctr"/>
           <a:lstStyle/>
           <a:p>
-            <a:pPr indent="0" marL="0">
+            <a:pPr marL="0" indent="0">
               <a:buNone/>
             </a:pPr>
             <a:r>
@@ -14089,7 +14094,7 @@
           <a:bodyPr wrap="square" lIns="0" tIns="0" rIns="0" bIns="0" rtlCol="0" anchor="ctr"/>
           <a:lstStyle/>
           <a:p>
-            <a:pPr indent="0" marL="0">
+            <a:pPr marL="0" indent="0">
               <a:buNone/>
             </a:pPr>
             <a:r>
@@ -14153,7 +14158,7 @@
           <a:bodyPr wrap="square" lIns="0" tIns="0" rIns="0" bIns="0" rtlCol="0" anchor="ctr"/>
           <a:lstStyle/>
           <a:p>
-            <a:pPr algn="ctr" indent="0" marL="0">
+            <a:pPr marL="0" indent="0" algn="ctr">
               <a:buNone/>
             </a:pPr>
             <a:r>
@@ -14472,4 +14477,299 @@
     </a:ext>
   </a:extLst>
 </a:theme>
+</file>
+
+<file path=ppt/theme/theme2.xml><?xml version="1.0" encoding="utf-8"?>
+<a:theme xmlns:a="http://schemas.openxmlformats.org/drawingml/2006/main" name="Office Theme">
+  <a:themeElements>
+    <a:clrScheme name="Office">
+      <a:dk1>
+        <a:sysClr val="windowText" lastClr="000000"/>
+      </a:dk1>
+      <a:lt1>
+        <a:sysClr val="window" lastClr="FFFFFF"/>
+      </a:lt1>
+      <a:dk2>
+        <a:srgbClr val="44546A"/>
+      </a:dk2>
+      <a:lt2>
+        <a:srgbClr val="E7E6E6"/>
+      </a:lt2>
+      <a:accent1>
+        <a:srgbClr val="4472C4"/>
+      </a:accent1>
+      <a:accent2>
+        <a:srgbClr val="ED7D31"/>
+      </a:accent2>
+      <a:accent3>
+        <a:srgbClr val="A5A5A5"/>
+      </a:accent3>
+      <a:accent4>
+        <a:srgbClr val="FFC000"/>
+      </a:accent4>
+      <a:accent5>
+        <a:srgbClr val="5B9BD5"/>
+      </a:accent5>
+      <a:accent6>
+        <a:srgbClr val="70AD47"/>
+      </a:accent6>
+      <a:hlink>
+        <a:srgbClr val="0563C1"/>
+      </a:hlink>
+      <a:folHlink>
+        <a:srgbClr val="954F72"/>
+      </a:folHlink>
+    </a:clrScheme>
+    <a:fontScheme name="Office">
+      <a:majorFont>
+        <a:latin typeface="Calibri Light" panose="020F0302020204030204"/>
+        <a:ea typeface=""/>
+        <a:cs typeface=""/>
+        <a:font script="Jpan" typeface="游ゴシック Light"/>
+        <a:font script="Hang" typeface="맑은 고딕"/>
+        <a:font script="Hans" typeface="等线 Light"/>
+        <a:font script="Hant" typeface="新細明體"/>
+        <a:font script="Arab" typeface="Times New Roman"/>
+        <a:font script="Hebr" typeface="Times New Roman"/>
+        <a:font script="Thai" typeface="Angsana New"/>
+        <a:font script="Ethi" typeface="Nyala"/>
+        <a:font script="Beng" typeface="Vrinda"/>
+        <a:font script="Gujr" typeface="Shruti"/>
+        <a:font script="Khmr" typeface="MoolBoran"/>
+        <a:font script="Knda" typeface="Tunga"/>
+        <a:font script="Guru" typeface="Raavi"/>
+        <a:font script="Cans" typeface="Euphemia"/>
+        <a:font script="Cher" typeface="Plantagenet Cherokee"/>
+        <a:font script="Yiii" typeface="Microsoft Yi Baiti"/>
+        <a:font script="Tibt" typeface="Microsoft Himalaya"/>
+        <a:font script="Thaa" typeface="MV Boli"/>
+        <a:font script="Deva" typeface="Mangal"/>
+        <a:font script="Telu" typeface="Gautami"/>
+        <a:font script="Taml" typeface="Latha"/>
+        <a:font script="Syrc" typeface="Estrangelo Edessa"/>
+        <a:font script="Orya" typeface="Kalinga"/>
+        <a:font script="Mlym" typeface="Kartika"/>
+        <a:font script="Laoo" typeface="DokChampa"/>
+        <a:font script="Sinh" typeface="Iskoola Pota"/>
+        <a:font script="Mong" typeface="Mongolian Baiti"/>
+        <a:font script="Viet" typeface="Times New Roman"/>
+        <a:font script="Uigh" typeface="Microsoft Uighur"/>
+        <a:font script="Geor" typeface="Sylfaen"/>
+        <a:font script="Armn" typeface="Arial"/>
+        <a:font script="Bugi" typeface="Leelawadee UI"/>
+        <a:font script="Bopo" typeface="Microsoft JhengHei"/>
+        <a:font script="Java" typeface="Javanese Text"/>
+        <a:font script="Lisu" typeface="Segoe UI"/>
+        <a:font script="Mymr" typeface="Myanmar Text"/>
+        <a:font script="Nkoo" typeface="Ebrima"/>
+        <a:font script="Olck" typeface="Nirmala UI"/>
+        <a:font script="Osma" typeface="Ebrima"/>
+        <a:font script="Phag" typeface="Phagspa"/>
+        <a:font script="Syrn" typeface="Estrangelo Edessa"/>
+        <a:font script="Syrj" typeface="Estrangelo Edessa"/>
+        <a:font script="Syre" typeface="Estrangelo Edessa"/>
+        <a:font script="Sora" typeface="Nirmala UI"/>
+        <a:font script="Tale" typeface="Microsoft Tai Le"/>
+        <a:font script="Talu" typeface="Microsoft New Tai Lue"/>
+        <a:font script="Tfng" typeface="Ebrima"/>
+      </a:majorFont>
+      <a:minorFont>
+        <a:latin typeface="Calibri" panose="020F0502020204030204"/>
+        <a:ea typeface=""/>
+        <a:cs typeface=""/>
+        <a:font script="Jpan" typeface="游ゴシック"/>
+        <a:font script="Hang" typeface="맑은 고딕"/>
+        <a:font script="Hans" typeface="等线"/>
+        <a:font script="Hant" typeface="新細明體"/>
+        <a:font script="Arab" typeface="Arial"/>
+        <a:font script="Hebr" typeface="Arial"/>
+        <a:font script="Thai" typeface="Cordia New"/>
+        <a:font script="Ethi" typeface="Nyala"/>
+        <a:font script="Beng" typeface="Vrinda"/>
+        <a:font script="Gujr" typeface="Shruti"/>
+        <a:font script="Khmr" typeface="DaunPenh"/>
+        <a:font script="Knda" typeface="Tunga"/>
+        <a:font script="Guru" typeface="Raavi"/>
+        <a:font script="Cans" typeface="Euphemia"/>
+        <a:font script="Cher" typeface="Plantagenet Cherokee"/>
+        <a:font script="Yiii" typeface="Microsoft Yi Baiti"/>
+        <a:font script="Tibt" typeface="Microsoft Himalaya"/>
+        <a:font script="Thaa" typeface="MV Boli"/>
+        <a:font script="Deva" typeface="Mangal"/>
+        <a:font script="Telu" typeface="Gautami"/>
+        <a:font script="Taml" typeface="Latha"/>
+        <a:font script="Syrc" typeface="Estrangelo Edessa"/>
+        <a:font script="Orya" typeface="Kalinga"/>
+        <a:font script="Mlym" typeface="Kartika"/>
+        <a:font script="Laoo" typeface="DokChampa"/>
+        <a:font script="Sinh" typeface="Iskoola Pota"/>
+        <a:font script="Mong" typeface="Mongolian Baiti"/>
+        <a:font script="Viet" typeface="Arial"/>
+        <a:font script="Uigh" typeface="Microsoft Uighur"/>
+        <a:font script="Geor" typeface="Sylfaen"/>
+        <a:font script="Armn" typeface="Arial"/>
+        <a:font script="Bugi" typeface="Leelawadee UI"/>
+        <a:font script="Bopo" typeface="Microsoft JhengHei"/>
+        <a:font script="Java" typeface="Javanese Text"/>
+        <a:font script="Lisu" typeface="Segoe UI"/>
+        <a:font script="Mymr" typeface="Myanmar Text"/>
+        <a:font script="Nkoo" typeface="Ebrima"/>
+        <a:font script="Olck" typeface="Nirmala UI"/>
+        <a:font script="Osma" typeface="Ebrima"/>
+        <a:font script="Phag" typeface="Phagspa"/>
+        <a:font script="Syrn" typeface="Estrangelo Edessa"/>
+        <a:font script="Syrj" typeface="Estrangelo Edessa"/>
+        <a:font script="Syre" typeface="Estrangelo Edessa"/>
+        <a:font script="Sora" typeface="Nirmala UI"/>
+        <a:font script="Tale" typeface="Microsoft Tai Le"/>
+        <a:font script="Talu" typeface="Microsoft New Tai Lue"/>
+        <a:font script="Tfng" typeface="Ebrima"/>
+      </a:minorFont>
+    </a:fontScheme>
+    <a:fmtScheme name="Office">
+      <a:fillStyleLst>
+        <a:solidFill>
+          <a:schemeClr val="phClr"/>
+        </a:solidFill>
+        <a:gradFill rotWithShape="1">
+          <a:gsLst>
+            <a:gs pos="0">
+              <a:schemeClr val="phClr">
+                <a:lumMod val="110000"/>
+                <a:satMod val="105000"/>
+                <a:tint val="67000"/>
+              </a:schemeClr>
+            </a:gs>
+            <a:gs pos="50000">
+              <a:schemeClr val="phClr">
+                <a:lumMod val="105000"/>
+                <a:satMod val="103000"/>
+                <a:tint val="73000"/>
+              </a:schemeClr>
+            </a:gs>
+            <a:gs pos="100000">
+              <a:schemeClr val="phClr">
+                <a:lumMod val="105000"/>
+                <a:satMod val="109000"/>
+                <a:tint val="81000"/>
+              </a:schemeClr>
+            </a:gs>
+          </a:gsLst>
+          <a:lin ang="5400000" scaled="0"/>
+        </a:gradFill>
+        <a:gradFill rotWithShape="1">
+          <a:gsLst>
+            <a:gs pos="0">
+              <a:schemeClr val="phClr">
+                <a:satMod val="103000"/>
+                <a:lumMod val="102000"/>
+                <a:tint val="94000"/>
+              </a:schemeClr>
+            </a:gs>
+            <a:gs pos="50000">
+              <a:schemeClr val="phClr">
+                <a:satMod val="110000"/>
+                <a:lumMod val="100000"/>
+                <a:shade val="100000"/>
+              </a:schemeClr>
+            </a:gs>
+            <a:gs pos="100000">
+              <a:schemeClr val="phClr">
+                <a:lumMod val="99000"/>
+                <a:satMod val="120000"/>
+                <a:shade val="78000"/>
+              </a:schemeClr>
+            </a:gs>
+          </a:gsLst>
+          <a:lin ang="5400000" scaled="0"/>
+        </a:gradFill>
+      </a:fillStyleLst>
+      <a:lnStyleLst>
+        <a:ln w="6350" cap="flat" cmpd="sng" algn="ctr">
+          <a:solidFill>
+            <a:schemeClr val="phClr"/>
+          </a:solidFill>
+          <a:prstDash val="solid"/>
+          <a:miter lim="800000"/>
+        </a:ln>
+        <a:ln w="12700" cap="flat" cmpd="sng" algn="ctr">
+          <a:solidFill>
+            <a:schemeClr val="phClr"/>
+          </a:solidFill>
+          <a:prstDash val="solid"/>
+          <a:miter lim="800000"/>
+        </a:ln>
+        <a:ln w="19050" cap="flat" cmpd="sng" algn="ctr">
+          <a:solidFill>
+            <a:schemeClr val="phClr"/>
+          </a:solidFill>
+          <a:prstDash val="solid"/>
+          <a:miter lim="800000"/>
+        </a:ln>
+      </a:lnStyleLst>
+      <a:effectStyleLst>
+        <a:effectStyle>
+          <a:effectLst/>
+        </a:effectStyle>
+        <a:effectStyle>
+          <a:effectLst/>
+        </a:effectStyle>
+        <a:effectStyle>
+          <a:effectLst>
+            <a:outerShdw blurRad="57150" dist="19050" dir="5400000" algn="ctr" rotWithShape="0">
+              <a:srgbClr val="000000">
+                <a:alpha val="63000"/>
+              </a:srgbClr>
+            </a:outerShdw>
+          </a:effectLst>
+        </a:effectStyle>
+      </a:effectStyleLst>
+      <a:bgFillStyleLst>
+        <a:solidFill>
+          <a:schemeClr val="phClr"/>
+        </a:solidFill>
+        <a:solidFill>
+          <a:schemeClr val="phClr">
+            <a:tint val="95000"/>
+            <a:satMod val="170000"/>
+          </a:schemeClr>
+        </a:solidFill>
+        <a:gradFill rotWithShape="1">
+          <a:gsLst>
+            <a:gs pos="0">
+              <a:schemeClr val="phClr">
+                <a:tint val="93000"/>
+                <a:satMod val="150000"/>
+                <a:shade val="98000"/>
+                <a:lumMod val="102000"/>
+              </a:schemeClr>
+            </a:gs>
+            <a:gs pos="50000">
+              <a:schemeClr val="phClr">
+                <a:tint val="98000"/>
+                <a:satMod val="130000"/>
+                <a:shade val="90000"/>
+                <a:lumMod val="103000"/>
+              </a:schemeClr>
+            </a:gs>
+            <a:gs pos="100000">
+              <a:schemeClr val="phClr">
+                <a:shade val="63000"/>
+                <a:satMod val="120000"/>
+              </a:schemeClr>
+            </a:gs>
+          </a:gsLst>
+          <a:lin ang="5400000" scaled="0"/>
+        </a:gradFill>
+      </a:bgFillStyleLst>
+    </a:fmtScheme>
+  </a:themeElements>
+  <a:objectDefaults/>
+  <a:extraClrSchemeLst/>
+  <a:extLst>
+    <a:ext uri="{05A4C25C-085E-4340-85A3-A5531E510DB2}">
+      <thm15:themeFamily xmlns:thm15="http://schemas.microsoft.com/office/thememl/2012/main" name="Office Theme" id="{62F939B6-93AF-4DB8-9C6B-D6C7DFDC589F}" vid="{4A3C46E8-61CC-4603-A589-7422A47A8E4A}"/>
+    </a:ext>
+  </a:extLst>
+</a:theme>
 </file>